--- a/slides/pptx/week14.pptx
+++ b/slides/pptx/week14.pptx
@@ -19,9 +19,10 @@
     <p:sldId id="267" r:id="rId13"/>
     <p:sldId id="268" r:id="rId14"/>
     <p:sldId id="269" r:id="rId15"/>
+    <p:sldId id="270" r:id="rId16"/>
   </p:sldIdLst>
   <p:notesMasterIdLst>
-    <p:notesMasterId r:id="rId16"/>
+    <p:notesMasterId r:id="rId17"/>
   </p:notesMasterIdLst>
   <p:sldSz cx="9144000" cy="5143500"/>
   <p:notesSz cx="5143500" cy="9144000"/>
@@ -603,7 +604,7 @@
           <a:p>
             <a:r>
               <a:rPr lang="en-US" dirty="0"/>
-              <a:t>The payoff — map each defense to a leg of the pattern: least-privilege tools cut PRIVILEGE; isolating RAG content cuts UNTRUSTED INPUT; egress limits + human approval cut the OUTBOUND CHANNEL. No single guardrail is enough; layer them. ~5 min.</a:t>
+              <a:t>The payoff — map each defense to a leg of the pattern: least-privilege tools cut PRIVILEGE; isolating RAG content cuts UNTRUSTED INPUT; egress limits + human approval cut the OUTBOUND CHANNEL. Be honest that the first three are hands-on today and the fourth bullet is discussion-only — don't let the deck imply an agent demo that doesn't exist. No single guardrail is enough; layer them. ~5 min.</a:t>
             </a:r>
             <a:endParaRPr lang="en-US" dirty="0"/>
           </a:p>
@@ -691,7 +692,7 @@
           <a:p>
             <a:r>
               <a:rPr lang="en-US" dirty="0"/>
-              <a:t>Gandalf (Lakera) is genuinely fun and free — students compete to climb levels. Round 2 (build guardrails + least-privilege tools) is graded. Q6 of the quiz asks for the injection that captured the flag + why the guardrail failed. ~3 min.</a:t>
+              <a:t>Gandalf (Lakera) is genuinely fun and free — students compete to climb levels. Round 2 (Task 5: replay against guarded_chatbot.py) is graded — the point is that guardrails/redaction/escaping visibly stop what worked before. Don't promise a live tool-poisoning demo; it's a discussion question. Q6 of the quiz asks for the injection that captured the flag + why the guardrail failed. ~3 min.</a:t>
             </a:r>
             <a:endParaRPr lang="en-US" dirty="0"/>
           </a:p>
@@ -779,7 +780,7 @@
           <a:p>
             <a:r>
               <a:rPr lang="en-US" dirty="0"/>
-              <a:t>The least-privilege tool design is the thinking deliverable. Especially fitting this week: the Audit-the-AI task critiques an AI's own (insecure) answer.</a:t>
+              <a:t>Six graded pieces, not three — the least-privilege tool design is a written reflection, not a build, so don't let students think they're missing a coding artifact for it. Especially fitting this week: the Audit-the-AI task critiques an AI's own (insecure) answer. Ports are 8082/8083 — the old pair's 6000 half was genuinely unreachable (Chrome/Firefox both block port 6000, the X11 port, per their restricted-port lists); 6001 was never actually blocked anywhere, so if asked, the honest reason for the move is "6000 was dead and we replaced the whole pair," not "the browsers blocked both."</a:t>
             </a:r>
             <a:endParaRPr lang="en-US" dirty="0"/>
           </a:p>
@@ -867,7 +868,7 @@
           <a:p>
             <a:r>
               <a:rPr lang="en-US" dirty="0"/>
-              <a:t>Recap. Cold-call: "the agent read a malicious email and wired money — which leg of privilege+input+channel would you cut, and how?" ~2 min.</a:t>
+              <a:t>Six graded pieces, not three — the least-privilege tool design is a written reflection, not a build, so don't let students think they're missing a coding artifact for it. Especially fitting this week: the Audit-the-AI task critiques an AI's own (insecure) answer. Ports are 8082/8083 — the old pair's 6000 half was genuinely unreachable (Chrome/Firefox both block port 6000, the X11 port, per their restricted-port lists); 6001 was never actually blocked anywhere, so if asked, the honest reason for the move is "6000 was dead and we replaced the whole pair," not "the browsers blocked both."</a:t>
             </a:r>
             <a:endParaRPr lang="en-US" dirty="0"/>
           </a:p>
@@ -955,7 +956,7 @@
           <a:p>
             <a:r>
               <a:rPr lang="en-US" dirty="0"/>
-              <a:t>Cliffhanger: "Next week we wire the whole course into one CI/CD pipeline — Red vs Blue: sneak a vuln past the gate, or block it."</a:t>
+              <a:t>Recap. Cold-call: "the agent read a malicious email and wired money — which leg of privilege+input+channel would you cut, and how?" ~2 min.</a:t>
             </a:r>
             <a:endParaRPr lang="en-US" dirty="0"/>
           </a:p>
@@ -979,6 +980,94 @@
             <a:fld id="{F7021451-1387-4CA6-816F-3879F97B5CBC}" type="slidenum">
               <a:rPr lang="en-US"/>
               <a:t>14</a:t>
+            </a:fld>
+            <a:endParaRPr lang="en-US"/>
+          </a:p>
+        </p:txBody>
+      </p:sp>
+    </p:spTree>
+    <p:extLst>
+      <p:ext uri="{BB962C8B-B14F-4D97-AF65-F5344CB8AC3E}">
+        <p14:creationId xmlns:p14="http://schemas.microsoft.com/office/powerpoint/2010/main" val="1024086991"/>
+      </p:ext>
+    </p:extLst>
+  </p:cSld>
+  <p:clrMapOvr>
+    <a:masterClrMapping/>
+  </p:clrMapOvr>
+</p:notes>
+</file>
+
+<file path=ppt/notesSlides/notesSlide15.xml><?xml version="1.0" encoding="utf-8"?>
+<p:notes xmlns:a="http://schemas.openxmlformats.org/drawingml/2006/main" xmlns:r="http://schemas.openxmlformats.org/officeDocument/2006/relationships" xmlns:p="http://schemas.openxmlformats.org/presentationml/2006/main">
+  <p:cSld>
+    <p:spTree>
+      <p:nvGrpSpPr>
+        <p:cNvPr id="1" name=""/>
+        <p:cNvGrpSpPr/>
+        <p:nvPr/>
+      </p:nvGrpSpPr>
+      <p:grpSpPr>
+        <a:xfrm>
+          <a:off x="0" y="0"/>
+          <a:ext cx="0" cy="0"/>
+          <a:chOff x="0" y="0"/>
+          <a:chExt cx="0" cy="0"/>
+        </a:xfrm>
+      </p:grpSpPr>
+      <p:sp>
+        <p:nvSpPr>
+          <p:cNvPr id="2" name="Slide Image Placeholder 1"/>
+          <p:cNvSpPr>
+            <a:spLocks noGrp="1" noRot="1" noChangeAspect="1"/>
+          </p:cNvSpPr>
+          <p:nvPr>
+            <p:ph type="sldImg"/>
+          </p:nvPr>
+        </p:nvSpPr>
+        <p:spPr/>
+      </p:sp>
+      <p:sp>
+        <p:nvSpPr>
+          <p:cNvPr id="3" name="Notes Placeholder 2"/>
+          <p:cNvSpPr>
+            <a:spLocks noGrp="1"/>
+          </p:cNvSpPr>
+          <p:nvPr>
+            <p:ph type="body" idx="1"/>
+          </p:nvPr>
+        </p:nvSpPr>
+        <p:spPr/>
+        <p:txBody>
+          <a:bodyPr/>
+          <a:lstStyle/>
+          <a:p>
+            <a:r>
+              <a:rPr lang="en-US" dirty="0"/>
+              <a:t>Cliffhanger: "Next week we wire the whole course into one CI/CD pipeline — Red vs Blue: sneak a vuln past the gate, or block it."</a:t>
+            </a:r>
+            <a:endParaRPr lang="en-US" dirty="0"/>
+          </a:p>
+        </p:txBody>
+      </p:sp>
+      <p:sp>
+        <p:nvSpPr>
+          <p:cNvPr id="4" name="Slide Number Placeholder 3"/>
+          <p:cNvSpPr>
+            <a:spLocks noGrp="1"/>
+          </p:cNvSpPr>
+          <p:nvPr>
+            <p:ph type="sldNum" sz="quarter" idx="10"/>
+          </p:nvPr>
+        </p:nvSpPr>
+        <p:spPr/>
+        <p:txBody>
+          <a:bodyPr/>
+          <a:lstStyle/>
+          <a:p>
+            <a:fld id="{F7021451-1387-4CA6-816F-3879F97B5CBC}" type="slidenum">
+              <a:rPr lang="en-US"/>
+              <a:t>15</a:t>
             </a:fld>
             <a:endParaRPr lang="en-US"/>
           </a:p>
@@ -1219,7 +1308,7 @@
           <a:p>
             <a:r>
               <a:rPr lang="en-US" dirty="0"/>
-              <a:t>Don't read all 10 — highlight the 2025 changes. LLM07 (system-prompt leakage) is new because devs hid secrets in prompts. LLM10 reframed as runaway COST (an agent loop can run up a huge bill). ~4 min.</a:t>
+              <a:t>Don't read all 10 — highlight the 2025 changes. LLM07 (system-prompt leakage) is new because devs hid secrets in prompts. LLM10 reframed as runaway COST (an agent loop can run up a huge bill). Mention the 2026 edition exists so students who search OWASP themselves aren't confused by different numbers — but the quiz/worksheet key is 2025, don't let them "correct" an answer to 2026 numbering. ~4 min.</a:t>
             </a:r>
             <a:endParaRPr lang="en-US" dirty="0"/>
           </a:p>
@@ -1307,7 +1396,7 @@
           <a:p>
             <a:r>
               <a:rPr lang="en-US" dirty="0"/>
-              <a:t>The core concept — say "this is W4 injection in a new interpreter (the LLM)." Direct = the Gandalf game. Indirect is the scary one: the payload rides in a document/email/web page the model reads, so the victim never typed it. ~6 min.</a:t>
+              <a:t>The core concept — say "this is W4 injection in a new interpreter (the LLM)." Direct = the Gandalf game + graded Tasks 1-2, fully hands-on. Indirect is the scary one conceptually, but be upfront that this lab can't demonstrate it live — no retrieval pipeline exists to poison. ~6 min.</a:t>
             </a:r>
             <a:endParaRPr lang="en-US" dirty="0"/>
           </a:p>
@@ -2307,11 +2396,11 @@
         <p:spPr>
           <a:xfrm>
             <a:off x="457200" y="1325880"/>
-            <a:ext cx="8229600" cy="1517904"/>
+            <a:ext cx="8229600" cy="2523744"/>
           </a:xfrm>
           <a:prstGeom prst="roundRect">
             <a:avLst>
-              <a:gd name="adj" fmla="val 4819"/>
+              <a:gd name="adj" fmla="val 2899"/>
             </a:avLst>
           </a:prstGeom>
           <a:solidFill>
@@ -2336,7 +2425,7 @@
         <p:spPr>
           <a:xfrm>
             <a:off x="731520" y="1435608"/>
-            <a:ext cx="7680960" cy="1298448"/>
+            <a:ext cx="7680960" cy="2304288"/>
           </a:xfrm>
           <a:prstGeom prst="rect">
             <a:avLst/>
@@ -2345,7 +2434,9 @@
           <a:ln/>
         </p:spPr>
         <p:txBody>
-          <a:bodyPr wrap="square" lIns="0" tIns="0" rIns="0" bIns="0" rtlCol="0" anchor="t"/>
+          <a:bodyPr wrap="square" lIns="0" tIns="0" rIns="0" bIns="0" rtlCol="0" anchor="t">
+            <a:normAutofit/>
+          </a:bodyPr>
           <a:lstStyle/>
           <a:p>
             <a:pPr marL="342900" indent="-342900">
@@ -2364,7 +2455,7 @@
                 <a:ea typeface="Calibri" pitchFamily="34" charset="-122"/>
                 <a:cs typeface="Calibri" pitchFamily="34" charset="-120"/>
               </a:rPr>
-              <a:t>Input/output guardrails + content filtering</a:t>
+              <a:t>Input/output guardrails + content filtering — you'll build this: guarded_chatbot.py's regex denylist</a:t>
             </a:r>
             <a:endParaRPr lang="en-US" sz="1400" dirty="0"/>
           </a:p>
@@ -2385,7 +2476,7 @@
                 <a:ea typeface="Calibri" pitchFamily="34" charset="-122"/>
                 <a:cs typeface="Calibri" pitchFamily="34" charset="-120"/>
               </a:rPr>
-              <a:t>Strict output schemas/validation; encode before downstream use</a:t>
+              <a:t>Strict output schemas/validation; encode before downstream use — you'll build this: HTML-escaping the model's output</a:t>
             </a:r>
             <a:endParaRPr lang="en-US" sz="1400" dirty="0"/>
           </a:p>
@@ -2406,7 +2497,7 @@
                 <a:ea typeface="Calibri" pitchFamily="34" charset="-122"/>
                 <a:cs typeface="Calibri" pitchFamily="34" charset="-120"/>
               </a:rPr>
-              <a:t>Least-privilege tool access + human-in-the-loop for sensitive actions</a:t>
+              <a:t>Redact secrets before they can reach a response — you'll build this: redact_secret()</a:t>
             </a:r>
             <a:endParaRPr lang="en-US" sz="1400" dirty="0"/>
           </a:p>
@@ -2427,7 +2518,7 @@
                 <a:ea typeface="Calibri" pitchFamily="34" charset="-122"/>
                 <a:cs typeface="Calibri" pitchFamily="34" charset="-120"/>
               </a:rPr>
-              <a:t>Rate/consumption limits; isolate untrusted content in RAG</a:t>
+              <a:t>Least-privilege tool access, human-in-the-loop, rate limits, isolating untrusted RAG content — concepts only this week (worksheet Q5); no agent/tool-calling code exists in this lab to demo</a:t>
             </a:r>
             <a:endParaRPr lang="en-US" sz="1400" dirty="0"/>
           </a:p>
@@ -2686,7 +2777,7 @@
         <p:spPr>
           <a:xfrm>
             <a:off x="1051560" y="1325880"/>
-            <a:ext cx="7589520" cy="384048"/>
+            <a:ext cx="7589520" cy="658368"/>
           </a:xfrm>
           <a:prstGeom prst="rect">
             <a:avLst/>
@@ -2695,7 +2786,9 @@
           <a:ln/>
         </p:spPr>
         <p:txBody>
-          <a:bodyPr wrap="square" lIns="0" tIns="0" rIns="0" bIns="0" rtlCol="0" anchor="ctr"/>
+          <a:bodyPr wrap="square" lIns="0" tIns="0" rIns="0" bIns="0" rtlCol="0" anchor="ctr">
+            <a:normAutofit/>
+          </a:bodyPr>
           <a:lstStyle/>
           <a:p>
             <a:pPr indent="0" marL="0">
@@ -2710,7 +2803,7 @@
                 <a:ea typeface="Calibri" pitchFamily="34" charset="-122"/>
                 <a:cs typeface="Calibri" pitchFamily="34" charset="-120"/>
               </a:rPr>
-              <a:t>Beat Gandalf levels via direct + indirect prompt injection → exfiltrate the secret (leaderboard by level)</a:t>
+              <a:t>Beat Gandalf levels via direct prompt injection → exfiltrate the secret (real external service, leaderboard by level)</a:t>
             </a:r>
             <a:endParaRPr lang="en-US" sz="1350" dirty="0"/>
           </a:p>
@@ -2724,7 +2817,7 @@
         </p:nvSpPr>
         <p:spPr>
           <a:xfrm>
-            <a:off x="502920" y="1783080"/>
+            <a:off x="502920" y="2057400"/>
             <a:ext cx="384048" cy="384048"/>
           </a:xfrm>
           <a:prstGeom prst="ellipse">
@@ -2744,7 +2837,7 @@
         </p:nvSpPr>
         <p:spPr>
           <a:xfrm>
-            <a:off x="502920" y="1783080"/>
+            <a:off x="502920" y="2057400"/>
             <a:ext cx="384048" cy="384048"/>
           </a:xfrm>
           <a:prstGeom prst="rect">
@@ -2783,8 +2876,8 @@
         </p:nvSpPr>
         <p:spPr>
           <a:xfrm>
-            <a:off x="1051560" y="1783080"/>
-            <a:ext cx="7589520" cy="384048"/>
+            <a:off x="1051560" y="2057400"/>
+            <a:ext cx="7589520" cy="658368"/>
           </a:xfrm>
           <a:prstGeom prst="rect">
             <a:avLst/>
@@ -2793,7 +2886,9 @@
           <a:ln/>
         </p:spPr>
         <p:txBody>
-          <a:bodyPr wrap="square" lIns="0" tIns="0" rIns="0" bIns="0" rtlCol="0" anchor="ctr"/>
+          <a:bodyPr wrap="square" lIns="0" tIns="0" rIns="0" bIns="0" rtlCol="0" anchor="ctr">
+            <a:normAutofit/>
+          </a:bodyPr>
           <a:lstStyle/>
           <a:p>
             <a:pPr indent="0" marL="0">
@@ -2808,7 +2903,7 @@
                 <a:ea typeface="Calibri" pitchFamily="34" charset="-122"/>
                 <a:cs typeface="Calibri" pitchFamily="34" charset="-120"/>
               </a:rPr>
-              <a:t>Demo tool poisoning / excessive agency on an agent with tools</a:t>
+              <a:t>Round 2 (graded): replay your winning injection + the reflected-XSS payload against the guarded bot — does it still land?</a:t>
             </a:r>
             <a:endParaRPr lang="en-US" sz="1350" dirty="0"/>
           </a:p>
@@ -2822,7 +2917,7 @@
         </p:nvSpPr>
         <p:spPr>
           <a:xfrm>
-            <a:off x="502920" y="2240280"/>
+            <a:off x="502920" y="2788920"/>
             <a:ext cx="384048" cy="384048"/>
           </a:xfrm>
           <a:prstGeom prst="ellipse">
@@ -2842,7 +2937,7 @@
         </p:nvSpPr>
         <p:spPr>
           <a:xfrm>
-            <a:off x="502920" y="2240280"/>
+            <a:off x="502920" y="2788920"/>
             <a:ext cx="384048" cy="384048"/>
           </a:xfrm>
           <a:prstGeom prst="rect">
@@ -2881,8 +2976,8 @@
         </p:nvSpPr>
         <p:spPr>
           <a:xfrm>
-            <a:off x="1051560" y="2240280"/>
-            <a:ext cx="7589520" cy="384048"/>
+            <a:off x="1051560" y="2788920"/>
+            <a:ext cx="7589520" cy="658368"/>
           </a:xfrm>
           <a:prstGeom prst="rect">
             <a:avLst/>
@@ -2891,7 +2986,9 @@
           <a:ln/>
         </p:spPr>
         <p:txBody>
-          <a:bodyPr wrap="square" lIns="0" tIns="0" rIns="0" bIns="0" rtlCol="0" anchor="ctr"/>
+          <a:bodyPr wrap="square" lIns="0" tIns="0" rIns="0" bIns="0" rtlCol="0" anchor="ctr">
+            <a:normAutofit/>
+          </a:bodyPr>
           <a:lstStyle/>
           <a:p>
             <a:pPr indent="0" marL="0">
@@ -2906,7 +3003,7 @@
                 <a:ea typeface="Calibri" pitchFamily="34" charset="-122"/>
                 <a:cs typeface="Calibri" pitchFamily="34" charset="-120"/>
               </a:rPr>
-              <a:t>Round 2: add guardrails + least-privilege tools, re-test</a:t>
+              <a:t>Written only: tool poisoning / excessive agency on an MCP-style agent (worksheet Q5) — no agent exists in this lab to demo live</a:t>
             </a:r>
             <a:endParaRPr lang="en-US" sz="1350" dirty="0"/>
           </a:p>
@@ -3137,7 +3234,9 @@
           <a:ln/>
         </p:spPr>
         <p:txBody>
-          <a:bodyPr wrap="square" lIns="0" tIns="0" rIns="0" bIns="0" rtlCol="0" anchor="ctr"/>
+          <a:bodyPr wrap="square" lIns="0" tIns="0" rIns="0" bIns="0" rtlCol="0" anchor="ctr">
+            <a:normAutofit/>
+          </a:bodyPr>
           <a:lstStyle/>
           <a:p>
             <a:pPr indent="0" marL="0">
@@ -3152,7 +3251,7 @@
                 <a:ea typeface="Calibri" pitchFamily="34" charset="-122"/>
                 <a:cs typeface="Calibri" pitchFamily="34" charset="-120"/>
               </a:rPr>
-              <a:t>📋 Worksheet 14 — labs/week14-ai-llm-security/worksheet.md (Part 3) · kickoff: docker compose up → :6000 (insecure) / :6001 (guarded)</a:t>
+              <a:t>📋 Worksheet 14 — labs/week14-ai-llm-security/worksheet.md (Part 3) · kickoff: docker compose up → :8082 (insecure) / :8083 (guarded)</a:t>
             </a:r>
             <a:endParaRPr lang="en-US" sz="1400" dirty="0"/>
           </a:p>
@@ -3167,11 +3266,11 @@
         <p:spPr>
           <a:xfrm>
             <a:off x="457200" y="2313432"/>
-            <a:ext cx="8229600" cy="1517904"/>
+            <a:ext cx="8229600" cy="2231136"/>
           </a:xfrm>
           <a:prstGeom prst="roundRect">
             <a:avLst>
-              <a:gd name="adj" fmla="val 4819"/>
+              <a:gd name="adj" fmla="val 3279"/>
             </a:avLst>
           </a:prstGeom>
           <a:solidFill>
@@ -3196,7 +3295,7 @@
         <p:spPr>
           <a:xfrm>
             <a:off x="731520" y="2423160"/>
-            <a:ext cx="7680960" cy="1298448"/>
+            <a:ext cx="7680960" cy="2011680"/>
           </a:xfrm>
           <a:prstGeom prst="rect">
             <a:avLst/>
@@ -3205,7 +3304,9 @@
           <a:ln/>
         </p:spPr>
         <p:txBody>
-          <a:bodyPr wrap="square" lIns="0" tIns="0" rIns="0" bIns="0" rtlCol="0" anchor="t"/>
+          <a:bodyPr wrap="square" lIns="0" tIns="0" rIns="0" bIns="0" rtlCol="0" anchor="t">
+            <a:normAutofit/>
+          </a:bodyPr>
           <a:lstStyle/>
           <a:p>
             <a:pPr marL="342900" indent="-342900">
@@ -3224,7 +3325,7 @@
                 <a:ea typeface="Calibri" pitchFamily="34" charset="-122"/>
                 <a:cs typeface="Calibri" pitchFamily="34" charset="-120"/>
               </a:rPr>
-              <a:t>Attack log (which injection beat which level)</a:t>
+              <a:t>Attack log: prompt-injection disclosure (Task 1) + reflected-XSS from unescaped output (Task 2)</a:t>
             </a:r>
             <a:endParaRPr lang="en-US" sz="1400" dirty="0"/>
           </a:p>
@@ -3245,7 +3346,7 @@
                 <a:ea typeface="Calibri" pitchFamily="34" charset="-122"/>
                 <a:cs typeface="Calibri" pitchFamily="34" charset="-120"/>
               </a:rPr>
-              <a:t>Mitigations + re-test results</a:t>
+              <a:t>Written: indirect-injection thought experiment (Task 3)</a:t>
             </a:r>
             <a:endParaRPr lang="en-US" sz="1400" dirty="0"/>
           </a:p>
@@ -3266,7 +3367,7 @@
                 <a:ea typeface="Calibri" pitchFamily="34" charset="-122"/>
                 <a:cs typeface="Calibri" pitchFamily="34" charset="-120"/>
               </a:rPr>
-              <a:t>Least-privilege agent/MCP tool design</a:t>
+              <a:t>Gandalf leaderboard result (Task 4)</a:t>
             </a:r>
             <a:endParaRPr lang="en-US" sz="1400" dirty="0"/>
           </a:p>
@@ -3287,7 +3388,28 @@
                 <a:ea typeface="Calibri" pitchFamily="34" charset="-122"/>
                 <a:cs typeface="Calibri" pitchFamily="34" charset="-120"/>
               </a:rPr>
-              <a:t>+ Audit the AI / EiPE / Prompt Problem (see worksheet)</a:t>
+              <a:t>Mitigations + re-test results against the guarded bot (Task 5)</a:t>
+            </a:r>
+            <a:endParaRPr lang="en-US" sz="1400" dirty="0"/>
+          </a:p>
+          <a:p>
+            <a:pPr marL="342900" indent="-342900">
+              <a:spcAft>
+                <a:spcPts val="600"/>
+              </a:spcAft>
+              <a:buSzPct val="100000"/>
+              <a:buChar char="•"/>
+            </a:pPr>
+            <a:r>
+              <a:rPr lang="en-US" sz="1400" dirty="0">
+                <a:solidFill>
+                  <a:srgbClr val="1F2937"/>
+                </a:solidFill>
+                <a:latin typeface="Calibri" pitchFamily="34" charset="0"/>
+                <a:ea typeface="Calibri" pitchFamily="34" charset="-122"/>
+                <a:cs typeface="Calibri" pitchFamily="34" charset="-120"/>
+              </a:rPr>
+              <a:t>Written: least-privilege agent/MCP tool design (Part 2 Q5 — reflection, not a build)</a:t>
             </a:r>
             <a:endParaRPr lang="en-US" sz="1400" dirty="0"/>
           </a:p>
@@ -3472,7 +3594,7 @@
                 <a:ea typeface="Arial" pitchFamily="34" charset="-122"/>
                 <a:cs typeface="Arial" pitchFamily="34" charset="-120"/>
               </a:rPr>
-              <a:t>Key takeaways</a:t>
+              <a:t>Deliverable (cont.)</a:t>
             </a:r>
             <a:endParaRPr lang="en-US" sz="2600" dirty="0"/>
           </a:p>
@@ -3487,11 +3609,11 @@
         <p:spPr>
           <a:xfrm>
             <a:off x="457200" y="1325880"/>
-            <a:ext cx="8229600" cy="1207008"/>
+            <a:ext cx="8229600" cy="585216"/>
           </a:xfrm>
           <a:prstGeom prst="roundRect">
             <a:avLst>
-              <a:gd name="adj" fmla="val 6061"/>
+              <a:gd name="adj" fmla="val 12500"/>
             </a:avLst>
           </a:prstGeom>
           <a:solidFill>
@@ -3516,7 +3638,7 @@
         <p:spPr>
           <a:xfrm>
             <a:off x="731520" y="1435608"/>
-            <a:ext cx="7680960" cy="987552"/>
+            <a:ext cx="7680960" cy="365760"/>
           </a:xfrm>
           <a:prstGeom prst="rect">
             <a:avLst/>
@@ -3525,7 +3647,9 @@
           <a:ln/>
         </p:spPr>
         <p:txBody>
-          <a:bodyPr wrap="square" lIns="0" tIns="0" rIns="0" bIns="0" rtlCol="0" anchor="t"/>
+          <a:bodyPr wrap="square" lIns="0" tIns="0" rIns="0" bIns="0" rtlCol="0" anchor="t">
+            <a:normAutofit/>
+          </a:bodyPr>
           <a:lstStyle/>
           <a:p>
             <a:pPr marL="342900" indent="-342900">
@@ -3544,49 +3668,7 @@
                 <a:ea typeface="Calibri" pitchFamily="34" charset="-122"/>
                 <a:cs typeface="Calibri" pitchFamily="34" charset="-120"/>
               </a:rPr>
-              <a:t>Prompt injection = injection; LLM output = untrusted</a:t>
-            </a:r>
-            <a:endParaRPr lang="en-US" sz="1400" dirty="0"/>
-          </a:p>
-          <a:p>
-            <a:pPr marL="342900" indent="-342900">
-              <a:spcAft>
-                <a:spcPts val="600"/>
-              </a:spcAft>
-              <a:buSzPct val="100000"/>
-              <a:buChar char="•"/>
-            </a:pPr>
-            <a:r>
-              <a:rPr lang="en-US" sz="1400" dirty="0">
-                <a:solidFill>
-                  <a:srgbClr val="1F2937"/>
-                </a:solidFill>
-                <a:latin typeface="Calibri" pitchFamily="34" charset="0"/>
-                <a:ea typeface="Calibri" pitchFamily="34" charset="-122"/>
-                <a:cs typeface="Calibri" pitchFamily="34" charset="-120"/>
-              </a:rPr>
-              <a:t>Constrain agency: least-privilege tools, human approval</a:t>
-            </a:r>
-            <a:endParaRPr lang="en-US" sz="1400" dirty="0"/>
-          </a:p>
-          <a:p>
-            <a:pPr marL="342900" indent="-342900">
-              <a:spcAft>
-                <a:spcPts val="600"/>
-              </a:spcAft>
-              <a:buSzPct val="100000"/>
-              <a:buChar char="•"/>
-            </a:pPr>
-            <a:r>
-              <a:rPr lang="en-US" sz="1400" dirty="0">
-                <a:solidFill>
-                  <a:srgbClr val="1F2937"/>
-                </a:solidFill>
-                <a:latin typeface="Calibri" pitchFamily="34" charset="0"/>
-                <a:ea typeface="Calibri" pitchFamily="34" charset="-122"/>
-                <a:cs typeface="Calibri" pitchFamily="34" charset="-120"/>
-              </a:rPr>
-              <a:t>The field moves monthly — track OWASP LLM + ATLAS</a:t>
+              <a:t>+ Audit the AI / EiPE / Prompt Problem (see worksheet)</a:t>
             </a:r>
             <a:endParaRPr lang="en-US" sz="1400" dirty="0"/>
           </a:p>
@@ -3689,6 +3771,307 @@
       </p:grpSpPr>
       <p:sp>
         <p:nvSpPr>
+          <p:cNvPr id="2" name="Shape 0"/>
+          <p:cNvSpPr/>
+          <p:nvPr/>
+        </p:nvSpPr>
+        <p:spPr>
+          <a:xfrm>
+            <a:off x="457200" y="384048"/>
+            <a:ext cx="530352" cy="530352"/>
+          </a:xfrm>
+          <a:prstGeom prst="ellipse">
+            <a:avLst/>
+          </a:prstGeom>
+          <a:solidFill>
+            <a:srgbClr val="E35205"/>
+          </a:solidFill>
+          <a:ln/>
+          <a:effectLst>
+            <a:outerShdw sx="100000" sy="100000" kx="0" ky="0" algn="bl" rotWithShape="0" blurRad="76200" dist="25400" dir="5400000">
+              <a:srgbClr val="000000">
+                <a:alpha val="12000"/>
+              </a:srgbClr>
+            </a:outerShdw>
+          </a:effectLst>
+        </p:spPr>
+      </p:sp>
+      <p:pic>
+        <p:nvPicPr>
+          <p:cNvPr id="3" name="Image 0" descr="preencoded.png">    </p:cNvPr>
+          <p:cNvPicPr>
+            <a:picLocks noChangeAspect="1"/>
+          </p:cNvPicPr>
+          <p:nvPr/>
+        </p:nvPicPr>
+        <p:blipFill>
+          <a:blip r:embed="rId1"/>
+          <a:stretch>
+            <a:fillRect/>
+          </a:stretch>
+        </p:blipFill>
+        <p:spPr>
+          <a:xfrm>
+            <a:off x="594360" y="521208"/>
+            <a:ext cx="256032" cy="256032"/>
+          </a:xfrm>
+          <a:prstGeom prst="rect">
+            <a:avLst/>
+          </a:prstGeom>
+        </p:spPr>
+      </p:pic>
+      <p:sp>
+        <p:nvSpPr>
+          <p:cNvPr id="4" name="Text 1"/>
+          <p:cNvSpPr/>
+          <p:nvPr/>
+        </p:nvSpPr>
+        <p:spPr>
+          <a:xfrm>
+            <a:off x="1143000" y="329184"/>
+            <a:ext cx="7498080" cy="603504"/>
+          </a:xfrm>
+          <a:prstGeom prst="rect">
+            <a:avLst/>
+          </a:prstGeom>
+          <a:noFill/>
+          <a:ln/>
+        </p:spPr>
+        <p:txBody>
+          <a:bodyPr wrap="square" lIns="0" tIns="0" rIns="0" bIns="0" rtlCol="0" anchor="ctr"/>
+          <a:lstStyle/>
+          <a:p>
+            <a:pPr indent="0" marL="0">
+              <a:buNone/>
+            </a:pPr>
+            <a:r>
+              <a:rPr lang="en-US" sz="2600" b="1" dirty="0">
+                <a:solidFill>
+                  <a:srgbClr val="1F2937"/>
+                </a:solidFill>
+                <a:latin typeface="Arial" pitchFamily="34" charset="0"/>
+                <a:ea typeface="Arial" pitchFamily="34" charset="-122"/>
+                <a:cs typeface="Arial" pitchFamily="34" charset="-120"/>
+              </a:rPr>
+              <a:t>Key takeaways</a:t>
+            </a:r>
+            <a:endParaRPr lang="en-US" sz="2600" dirty="0"/>
+          </a:p>
+        </p:txBody>
+      </p:sp>
+      <p:sp>
+        <p:nvSpPr>
+          <p:cNvPr id="5" name="Shape 2"/>
+          <p:cNvSpPr/>
+          <p:nvPr/>
+        </p:nvSpPr>
+        <p:spPr>
+          <a:xfrm>
+            <a:off x="457200" y="1325880"/>
+            <a:ext cx="8229600" cy="1207008"/>
+          </a:xfrm>
+          <a:prstGeom prst="roundRect">
+            <a:avLst>
+              <a:gd name="adj" fmla="val 6061"/>
+            </a:avLst>
+          </a:prstGeom>
+          <a:solidFill>
+            <a:srgbClr val="F1F5F9"/>
+          </a:solidFill>
+          <a:ln/>
+          <a:effectLst>
+            <a:outerShdw sx="100000" sy="100000" kx="0" ky="0" algn="bl" rotWithShape="0" blurRad="76200" dist="25400" dir="5400000">
+              <a:srgbClr val="000000">
+                <a:alpha val="12000"/>
+              </a:srgbClr>
+            </a:outerShdw>
+          </a:effectLst>
+        </p:spPr>
+      </p:sp>
+      <p:sp>
+        <p:nvSpPr>
+          <p:cNvPr id="6" name="Text 3"/>
+          <p:cNvSpPr/>
+          <p:nvPr/>
+        </p:nvSpPr>
+        <p:spPr>
+          <a:xfrm>
+            <a:off x="731520" y="1435608"/>
+            <a:ext cx="7680960" cy="987552"/>
+          </a:xfrm>
+          <a:prstGeom prst="rect">
+            <a:avLst/>
+          </a:prstGeom>
+          <a:noFill/>
+          <a:ln/>
+        </p:spPr>
+        <p:txBody>
+          <a:bodyPr wrap="square" lIns="0" tIns="0" rIns="0" bIns="0" rtlCol="0" anchor="t">
+            <a:normAutofit/>
+          </a:bodyPr>
+          <a:lstStyle/>
+          <a:p>
+            <a:pPr marL="342900" indent="-342900">
+              <a:spcAft>
+                <a:spcPts val="600"/>
+              </a:spcAft>
+              <a:buSzPct val="100000"/>
+              <a:buChar char="•"/>
+            </a:pPr>
+            <a:r>
+              <a:rPr lang="en-US" sz="1400" dirty="0">
+                <a:solidFill>
+                  <a:srgbClr val="1F2937"/>
+                </a:solidFill>
+                <a:latin typeface="Calibri" pitchFamily="34" charset="0"/>
+                <a:ea typeface="Calibri" pitchFamily="34" charset="-122"/>
+                <a:cs typeface="Calibri" pitchFamily="34" charset="-120"/>
+              </a:rPr>
+              <a:t>Prompt injection = injection; LLM output = untrusted</a:t>
+            </a:r>
+            <a:endParaRPr lang="en-US" sz="1400" dirty="0"/>
+          </a:p>
+          <a:p>
+            <a:pPr marL="342900" indent="-342900">
+              <a:spcAft>
+                <a:spcPts val="600"/>
+              </a:spcAft>
+              <a:buSzPct val="100000"/>
+              <a:buChar char="•"/>
+            </a:pPr>
+            <a:r>
+              <a:rPr lang="en-US" sz="1400" dirty="0">
+                <a:solidFill>
+                  <a:srgbClr val="1F2937"/>
+                </a:solidFill>
+                <a:latin typeface="Calibri" pitchFamily="34" charset="0"/>
+                <a:ea typeface="Calibri" pitchFamily="34" charset="-122"/>
+                <a:cs typeface="Calibri" pitchFamily="34" charset="-120"/>
+              </a:rPr>
+              <a:t>Constrain agency: least-privilege tools, human approval</a:t>
+            </a:r>
+            <a:endParaRPr lang="en-US" sz="1400" dirty="0"/>
+          </a:p>
+          <a:p>
+            <a:pPr marL="342900" indent="-342900">
+              <a:spcAft>
+                <a:spcPts val="600"/>
+              </a:spcAft>
+              <a:buSzPct val="100000"/>
+              <a:buChar char="•"/>
+            </a:pPr>
+            <a:r>
+              <a:rPr lang="en-US" sz="1400" dirty="0">
+                <a:solidFill>
+                  <a:srgbClr val="1F2937"/>
+                </a:solidFill>
+                <a:latin typeface="Calibri" pitchFamily="34" charset="0"/>
+                <a:ea typeface="Calibri" pitchFamily="34" charset="-122"/>
+                <a:cs typeface="Calibri" pitchFamily="34" charset="-120"/>
+              </a:rPr>
+              <a:t>The field moves monthly — track OWASP LLM + ATLAS</a:t>
+            </a:r>
+            <a:endParaRPr lang="en-US" sz="1400" dirty="0"/>
+          </a:p>
+        </p:txBody>
+      </p:sp>
+      <p:sp>
+        <p:nvSpPr>
+          <p:cNvPr id="7" name="Text 4"/>
+          <p:cNvSpPr/>
+          <p:nvPr/>
+        </p:nvSpPr>
+        <p:spPr>
+          <a:xfrm>
+            <a:off x="457200" y="4800600"/>
+            <a:ext cx="6949440" cy="274320"/>
+          </a:xfrm>
+          <a:prstGeom prst="rect">
+            <a:avLst/>
+          </a:prstGeom>
+          <a:noFill/>
+          <a:ln/>
+        </p:spPr>
+        <p:txBody>
+          <a:bodyPr wrap="square" lIns="0" tIns="0" rIns="0" bIns="0" rtlCol="0" anchor="ctr"/>
+          <a:lstStyle/>
+          <a:p>
+            <a:pPr indent="0" marL="0">
+              <a:buNone/>
+            </a:pPr>
+            <a:r>
+              <a:rPr lang="en-US" sz="900" dirty="0">
+                <a:solidFill>
+                  <a:srgbClr val="64748B"/>
+                </a:solidFill>
+                <a:latin typeface="Calibri" pitchFamily="34" charset="0"/>
+                <a:ea typeface="Calibri" pitchFamily="34" charset="-122"/>
+                <a:cs typeface="Calibri" pitchFamily="34" charset="-120"/>
+              </a:rPr>
+              <a:t>Software Security · Week 14</a:t>
+            </a:r>
+            <a:endParaRPr lang="en-US" sz="900" dirty="0"/>
+          </a:p>
+        </p:txBody>
+      </p:sp>
+      <p:pic>
+        <p:nvPicPr>
+          <p:cNvPr id="8" name="Image 1" descr="/Users/pop7/Library/CloudStorage/OneDrive-MonsterConnectCo.,Ltd/Lecture/KOSEN69 - software-security/slides/pptx/assets/logo-small.png">    </p:cNvPr>
+          <p:cNvPicPr>
+            <a:picLocks noChangeAspect="1"/>
+          </p:cNvPicPr>
+          <p:nvPr/>
+        </p:nvPicPr>
+        <p:blipFill>
+          <a:blip r:embed="rId2"/>
+          <a:stretch>
+            <a:fillRect/>
+          </a:stretch>
+        </p:blipFill>
+        <p:spPr>
+          <a:xfrm>
+            <a:off x="7882128" y="4700016"/>
+            <a:ext cx="768096" cy="356616"/>
+          </a:xfrm>
+          <a:prstGeom prst="rect">
+            <a:avLst/>
+          </a:prstGeom>
+        </p:spPr>
+      </p:pic>
+    </p:spTree>
+  </p:cSld>
+  <p:clrMapOvr>
+    <a:masterClrMapping/>
+  </p:clrMapOvr>
+</p:sld>
+</file>
+
+<file path=ppt/slides/slide15.xml><?xml version="1.0" encoding="utf-8"?>
+<p:sld xmlns:a="http://schemas.openxmlformats.org/drawingml/2006/main" xmlns:r="http://schemas.openxmlformats.org/officeDocument/2006/relationships" xmlns:p="http://schemas.openxmlformats.org/presentationml/2006/main">
+  <p:cSld name="Slide 15">
+    <p:bg>
+      <p:bgPr>
+        <a:solidFill>
+          <a:srgbClr val="FFFFFF"/>
+        </a:solidFill>
+      </p:bgPr>
+    </p:bg>
+    <p:spTree>
+      <p:nvGrpSpPr>
+        <p:cNvPr id="1" name=""/>
+        <p:cNvGrpSpPr/>
+        <p:nvPr/>
+      </p:nvGrpSpPr>
+      <p:grpSpPr>
+        <a:xfrm>
+          <a:off x="0" y="0"/>
+          <a:ext cx="0" cy="0"/>
+          <a:chOff x="0" y="0"/>
+          <a:chExt cx="0" cy="0"/>
+        </a:xfrm>
+      </p:grpSpPr>
+      <p:sp>
+        <p:nvSpPr>
           <p:cNvPr id="2" name="Text 0"/>
           <p:cNvSpPr/>
           <p:nvPr/>
@@ -3958,7 +4341,9 @@
           <a:ln/>
         </p:spPr>
         <p:txBody>
-          <a:bodyPr wrap="square" lIns="0" tIns="0" rIns="0" bIns="0" rtlCol="0" anchor="t"/>
+          <a:bodyPr wrap="square" lIns="0" tIns="0" rIns="0" bIns="0" rtlCol="0" anchor="t">
+            <a:normAutofit/>
+          </a:bodyPr>
           <a:lstStyle/>
           <a:p>
             <a:pPr marL="342900" indent="-342900">
@@ -4299,7 +4684,9 @@
           <a:ln/>
         </p:spPr>
         <p:txBody>
-          <a:bodyPr wrap="square" lIns="0" tIns="0" rIns="0" bIns="0" rtlCol="0" anchor="t"/>
+          <a:bodyPr wrap="square" lIns="0" tIns="0" rIns="0" bIns="0" rtlCol="0" anchor="t">
+            <a:normAutofit/>
+          </a:bodyPr>
           <a:lstStyle/>
           <a:p>
             <a:pPr marL="342900" indent="-342900">
@@ -5315,11 +5702,11 @@
         <p:spPr>
           <a:xfrm>
             <a:off x="457200" y="3191256"/>
-            <a:ext cx="8229600" cy="822960"/>
+            <a:ext cx="8229600" cy="1380744"/>
           </a:xfrm>
           <a:prstGeom prst="roundRect">
             <a:avLst>
-              <a:gd name="adj" fmla="val 8889"/>
+              <a:gd name="adj" fmla="val 5298"/>
             </a:avLst>
           </a:prstGeom>
           <a:solidFill>
@@ -5337,7 +5724,7 @@
         <p:spPr>
           <a:xfrm>
             <a:off x="731520" y="3191256"/>
-            <a:ext cx="7680960" cy="822960"/>
+            <a:ext cx="7680960" cy="1380744"/>
           </a:xfrm>
           <a:prstGeom prst="rect">
             <a:avLst/>
@@ -5346,7 +5733,9 @@
           <a:ln/>
         </p:spPr>
         <p:txBody>
-          <a:bodyPr wrap="square" lIns="0" tIns="0" rIns="0" bIns="0" rtlCol="0" anchor="ctr"/>
+          <a:bodyPr wrap="square" lIns="0" tIns="0" rIns="0" bIns="0" rtlCol="0" anchor="ctr">
+            <a:normAutofit/>
+          </a:bodyPr>
           <a:lstStyle/>
           <a:p>
             <a:pPr indent="0" marL="0">
@@ -5361,7 +5750,7 @@
                 <a:ea typeface="Calibri" pitchFamily="34" charset="-122"/>
                 <a:cs typeface="Calibri" pitchFamily="34" charset="-120"/>
               </a:rPr>
-              <a:t>New in 2025: LLM07 System Prompt Leakage · LLM08 promoted (RAG everywhere) · LLM10 replaces "DoS" with runaway cost.</a:t>
+              <a:t>New in 2025: LLM07 System Prompt Leakage · LLM08 promoted (RAG everywhere) · LLM10 replaces "DoS" with runaway cost. Heads up: OWASP shipped a 2026 edition days before this lecture (Excessive Agency jumps to #3, Output Handling drops to #10). This course's lab, worksheet, and quiz key are still on 2025 numbering — use 2025 for anything graded this term.</a:t>
             </a:r>
             <a:endParaRPr lang="en-US" sz="1400" dirty="0"/>
           </a:p>
@@ -5592,7 +5981,9 @@
           <a:ln/>
         </p:spPr>
         <p:txBody>
-          <a:bodyPr wrap="square" lIns="0" tIns="0" rIns="0" bIns="0" rtlCol="0" anchor="ctr"/>
+          <a:bodyPr wrap="square" lIns="0" tIns="0" rIns="0" bIns="0" rtlCol="0" anchor="ctr">
+            <a:normAutofit/>
+          </a:bodyPr>
           <a:lstStyle/>
           <a:p>
             <a:pPr indent="0" marL="0">
@@ -5622,11 +6013,11 @@
         <p:spPr>
           <a:xfrm>
             <a:off x="457200" y="2313432"/>
-            <a:ext cx="8229600" cy="896112"/>
+            <a:ext cx="8229600" cy="1499616"/>
           </a:xfrm>
           <a:prstGeom prst="roundRect">
             <a:avLst>
-              <a:gd name="adj" fmla="val 8163"/>
+              <a:gd name="adj" fmla="val 4878"/>
             </a:avLst>
           </a:prstGeom>
           <a:solidFill>
@@ -5651,7 +6042,7 @@
         <p:spPr>
           <a:xfrm>
             <a:off x="731520" y="2423160"/>
-            <a:ext cx="7680960" cy="676656"/>
+            <a:ext cx="7680960" cy="1280160"/>
           </a:xfrm>
           <a:prstGeom prst="rect">
             <a:avLst/>
@@ -5660,7 +6051,9 @@
           <a:ln/>
         </p:spPr>
         <p:txBody>
-          <a:bodyPr wrap="square" lIns="0" tIns="0" rIns="0" bIns="0" rtlCol="0" anchor="t"/>
+          <a:bodyPr wrap="square" lIns="0" tIns="0" rIns="0" bIns="0" rtlCol="0" anchor="t">
+            <a:normAutofit/>
+          </a:bodyPr>
           <a:lstStyle/>
           <a:p>
             <a:pPr marL="342900" indent="-342900">
@@ -5679,7 +6072,7 @@
                 <a:ea typeface="Calibri" pitchFamily="34" charset="-122"/>
                 <a:cs typeface="Calibri" pitchFamily="34" charset="-120"/>
               </a:rPr>
-              <a:t>Direct: user tells the bot to ignore its rules</a:t>
+              <a:t>Direct: user tells the bot to ignore its rules — this week's hands-on lab (Gandalf + Tasks 1-2)</a:t>
             </a:r>
             <a:endParaRPr lang="en-US" sz="1400" dirty="0"/>
           </a:p>
@@ -5700,7 +6093,7 @@
                 <a:ea typeface="Calibri" pitchFamily="34" charset="-122"/>
                 <a:cs typeface="Calibri" pitchFamily="34" charset="-120"/>
               </a:rPr>
-              <a:t>Indirect: malicious instructions hidden in a fetched doc / web page (RAG)</a:t>
+              <a:t>Indirect: malicious instructions hidden in a fetched doc / web page (RAG) — discussed, not built: the lab's mock LLM has no RAG/retrieval, so this is a thought experiment (worksheet Task 3), not something you'll exploit yourself today</a:t>
             </a:r>
             <a:endParaRPr lang="en-US" sz="1400" dirty="0"/>
           </a:p>
@@ -5938,7 +6331,9 @@
           <a:ln/>
         </p:spPr>
         <p:txBody>
-          <a:bodyPr wrap="square" lIns="0" tIns="0" rIns="0" bIns="0" rtlCol="0" anchor="t"/>
+          <a:bodyPr wrap="square" lIns="0" tIns="0" rIns="0" bIns="0" rtlCol="0" anchor="t">
+            <a:normAutofit/>
+          </a:bodyPr>
           <a:lstStyle/>
           <a:p>
             <a:pPr marL="342900" indent="-342900">
@@ -6199,11 +6594,11 @@
         <p:spPr>
           <a:xfrm>
             <a:off x="457200" y="1325880"/>
-            <a:ext cx="8229600" cy="1517904"/>
+            <a:ext cx="8229600" cy="2322576"/>
           </a:xfrm>
           <a:prstGeom prst="roundRect">
             <a:avLst>
-              <a:gd name="adj" fmla="val 4819"/>
+              <a:gd name="adj" fmla="val 3150"/>
             </a:avLst>
           </a:prstGeom>
           <a:solidFill>
@@ -6228,7 +6623,7 @@
         <p:spPr>
           <a:xfrm>
             <a:off x="731520" y="1435608"/>
-            <a:ext cx="7680960" cy="1298448"/>
+            <a:ext cx="7680960" cy="2103120"/>
           </a:xfrm>
           <a:prstGeom prst="rect">
             <a:avLst/>
@@ -6237,7 +6632,9 @@
           <a:ln/>
         </p:spPr>
         <p:txBody>
-          <a:bodyPr wrap="square" lIns="0" tIns="0" rIns="0" bIns="0" rtlCol="0" anchor="t"/>
+          <a:bodyPr wrap="square" lIns="0" tIns="0" rIns="0" bIns="0" rtlCol="0" anchor="t">
+            <a:normAutofit/>
+          </a:bodyPr>
           <a:lstStyle/>
           <a:p>
             <a:pPr marL="342900" indent="-342900">
@@ -6256,7 +6653,7 @@
                 <a:ea typeface="Calibri" pitchFamily="34" charset="-122"/>
                 <a:cs typeface="Calibri" pitchFamily="34" charset="-120"/>
               </a:rPr>
-              <a:t>Bing Chat "Sydney" (2023): hidden page text overrode system rules</a:t>
+              <a:t>Bing Chat "Sydney" (2023): a typed "ignore previous instructions" leaked the hidden system prompt — direct injection</a:t>
             </a:r>
             <a:endParaRPr lang="en-US" sz="1400" dirty="0"/>
           </a:p>
@@ -6298,7 +6695,7 @@
                 <a:ea typeface="Calibri" pitchFamily="34" charset="-122"/>
                 <a:cs typeface="Calibri" pitchFamily="34" charset="-120"/>
               </a:rPr>
-              <a:t>Auto-GPT wallet theft (2024): injected web/email content made an agent move crypto</a:t>
+              <a:t>Agentic tool-abuse: injected web/email content makes a tool-using agent take real actions (send mail, move funds, run code) — it trusts the text as instructions</a:t>
             </a:r>
             <a:endParaRPr lang="en-US" sz="1400" dirty="0"/>
           </a:p>
@@ -6333,12 +6730,12 @@
         </p:nvSpPr>
         <p:spPr>
           <a:xfrm>
-            <a:off x="457200" y="3008376"/>
-            <a:ext cx="8229600" cy="822960"/>
+            <a:off x="457200" y="3813048"/>
+            <a:ext cx="8229600" cy="758952"/>
           </a:xfrm>
           <a:prstGeom prst="roundRect">
             <a:avLst>
-              <a:gd name="adj" fmla="val 8889"/>
+              <a:gd name="adj" fmla="val 9639"/>
             </a:avLst>
           </a:prstGeom>
           <a:solidFill>
@@ -6355,8 +6752,8 @@
         </p:nvSpPr>
         <p:spPr>
           <a:xfrm>
-            <a:off x="731520" y="3008376"/>
-            <a:ext cx="7680960" cy="822960"/>
+            <a:off x="731520" y="3813048"/>
+            <a:ext cx="7680960" cy="758952"/>
           </a:xfrm>
           <a:prstGeom prst="rect">
             <a:avLst/>
@@ -6365,7 +6762,9 @@
           <a:ln/>
         </p:spPr>
         <p:txBody>
-          <a:bodyPr wrap="square" lIns="0" tIns="0" rIns="0" bIns="0" rtlCol="0" anchor="ctr"/>
+          <a:bodyPr wrap="square" lIns="0" tIns="0" rIns="0" bIns="0" rtlCol="0" anchor="ctr">
+            <a:normAutofit/>
+          </a:bodyPr>
           <a:lstStyle/>
           <a:p>
             <a:pPr indent="0" marL="0">
@@ -6618,7 +7017,9 @@
           <a:ln/>
         </p:spPr>
         <p:txBody>
-          <a:bodyPr wrap="square" lIns="0" tIns="0" rIns="0" bIns="0" rtlCol="0" anchor="t"/>
+          <a:bodyPr wrap="square" lIns="0" tIns="0" rIns="0" bIns="0" rtlCol="0" anchor="t">
+            <a:normAutofit/>
+          </a:bodyPr>
           <a:lstStyle/>
           <a:p>
             <a:pPr marL="342900" indent="-342900">
@@ -6900,11 +7301,11 @@
         <p:spPr>
           <a:xfrm>
             <a:off x="457200" y="1325880"/>
-            <a:ext cx="8229600" cy="1207008"/>
+            <a:ext cx="8229600" cy="1810512"/>
           </a:xfrm>
           <a:prstGeom prst="roundRect">
             <a:avLst>
-              <a:gd name="adj" fmla="val 6061"/>
+              <a:gd name="adj" fmla="val 4040"/>
             </a:avLst>
           </a:prstGeom>
           <a:solidFill>
@@ -6929,7 +7330,7 @@
         <p:spPr>
           <a:xfrm>
             <a:off x="731520" y="1435608"/>
-            <a:ext cx="7680960" cy="987552"/>
+            <a:ext cx="7680960" cy="1591056"/>
           </a:xfrm>
           <a:prstGeom prst="rect">
             <a:avLst/>
@@ -6938,7 +7339,9 @@
           <a:ln/>
         </p:spPr>
         <p:txBody>
-          <a:bodyPr wrap="square" lIns="0" tIns="0" rIns="0" bIns="0" rtlCol="0" anchor="t"/>
+          <a:bodyPr wrap="square" lIns="0" tIns="0" rIns="0" bIns="0" rtlCol="0" anchor="t">
+            <a:normAutofit/>
+          </a:bodyPr>
           <a:lstStyle/>
           <a:p>
             <a:pPr marL="342900" indent="-342900">
@@ -7013,7 +7416,7 @@
         </p:nvSpPr>
         <p:spPr>
           <a:xfrm>
-            <a:off x="457200" y="2697480"/>
+            <a:off x="457200" y="3300984"/>
             <a:ext cx="8229600" cy="822960"/>
           </a:xfrm>
           <a:prstGeom prst="roundRect">
@@ -7035,7 +7438,7 @@
         </p:nvSpPr>
         <p:spPr>
           <a:xfrm>
-            <a:off x="731520" y="2697480"/>
+            <a:off x="731520" y="3300984"/>
             <a:ext cx="7680960" cy="822960"/>
           </a:xfrm>
           <a:prstGeom prst="rect">
@@ -7045,7 +7448,9 @@
           <a:ln/>
         </p:spPr>
         <p:txBody>
-          <a:bodyPr wrap="square" lIns="0" tIns="0" rIns="0" bIns="0" rtlCol="0" anchor="ctr"/>
+          <a:bodyPr wrap="square" lIns="0" tIns="0" rIns="0" bIns="0" rtlCol="0" anchor="ctr">
+            <a:normAutofit/>
+          </a:bodyPr>
           <a:lstStyle/>
           <a:p>
             <a:pPr indent="0" marL="0">

--- a/slides/pptx/week14.pptx
+++ b/slides/pptx/week14.pptx
@@ -20,9 +20,10 @@
     <p:sldId id="268" r:id="rId14"/>
     <p:sldId id="269" r:id="rId15"/>
     <p:sldId id="270" r:id="rId16"/>
+    <p:sldId id="271" r:id="rId17"/>
   </p:sldIdLst>
   <p:notesMasterIdLst>
-    <p:notesMasterId r:id="rId17"/>
+    <p:notesMasterId r:id="rId18"/>
   </p:notesMasterIdLst>
   <p:sldSz cx="9144000" cy="5143500"/>
   <p:notesSz cx="5143500" cy="9144000"/>
@@ -604,7 +605,7 @@
           <a:p>
             <a:r>
               <a:rPr lang="en-US" dirty="0"/>
-              <a:t>The payoff — map each defense to a leg of the pattern: least-privilege tools cut PRIVILEGE; isolating RAG content cuts UNTRUSTED INPUT; egress limits + human approval cut the OUTBOUND CHANNEL. Be honest that the first three are hands-on today and the fourth bullet is discussion-only — don't let the deck imply an agent demo that doesn't exist. No single guardrail is enough; layer them. ~5 min.</a:t>
+              <a:t>The argument underneath everything today: prompt = system + "\nUser: " + user is ONE string, so the model has no way to tell "instructions I trust" from "text I should just process." Land on the last line before moving to Defenses — it's the direct setup for the three guardrail functions the sim demonstrates next. ~5 min.</a:t>
             </a:r>
             <a:endParaRPr lang="en-US" dirty="0"/>
           </a:p>
@@ -692,7 +693,7 @@
           <a:p>
             <a:r>
               <a:rPr lang="en-US" dirty="0"/>
-              <a:t>Gandalf (Lakera) is genuinely fun and free — students compete to climb levels. Round 2 (Task 5: replay against guarded_chatbot.py) is graded — the point is that guardrails/redaction/escaping visibly stop what worked before. Don't promise a live tool-poisoning demo; it's a discussion question. Q6 of the quiz asks for the injection that captured the flag + why the guardrail failed. ~3 min.</a:t>
+              <a:t>The payoff — map each defense to a leg of the pattern: least-privilege tools cut PRIVILEGE; isolating RAG content cuts UNTRUSTED INPUT; egress limits + human approval cut the OUTBOUND CHANNEL. The sim runs the actual guardrail/redact/escape code from guarded_chatbot.py against whatever they type, layer by layer — including the uncomfortable case where a phrase slips past the regex but redaction still catches the secret. Be honest that the first three are hands-on today and the fourth bullet is discussion-only. No single guardrail is enough; layer them. ~5 min.</a:t>
             </a:r>
             <a:endParaRPr lang="en-US" dirty="0"/>
           </a:p>
@@ -780,7 +781,7 @@
           <a:p>
             <a:r>
               <a:rPr lang="en-US" dirty="0"/>
-              <a:t>Six graded pieces, not three — the least-privilege tool design is a written reflection, not a build, so don't let students think they're missing a coding artifact for it. Especially fitting this week: the Audit-the-AI task critiques an AI's own (insecure) answer. Ports are 8082/8083 — the old pair's 6000 half was genuinely unreachable (Chrome/Firefox both block port 6000, the X11 port, per their restricted-port lists); 6001 was never actually blocked anywhere, so if asked, the honest reason for the move is "6000 was dead and we replaced the whole pair," not "the browsers blocked both."</a:t>
+              <a:t>Gandalf (Lakera) is genuinely fun and free — students compete to climb levels. Round 2 (Task 5: replay against guarded_chatbot.py) is graded — the point is that guardrails/redaction/escaping visibly stop what worked before. Don't promise a live tool-poisoning demo; it's a discussion question. Q6 of the quiz asks for the injection that captured the flag + why the guardrail failed. ~3 min.</a:t>
             </a:r>
             <a:endParaRPr lang="en-US" dirty="0"/>
           </a:p>
@@ -956,7 +957,7 @@
           <a:p>
             <a:r>
               <a:rPr lang="en-US" dirty="0"/>
-              <a:t>Recap. Cold-call: "the agent read a malicious email and wired money — which leg of privilege+input+channel would you cut, and how?" ~2 min.</a:t>
+              <a:t>Six graded pieces, not three — the least-privilege tool design is a written reflection, not a build, so don't let students think they're missing a coding artifact for it. Especially fitting this week: the Audit-the-AI task critiques an AI's own (insecure) answer. Ports are 8082/8083 — the old pair's 6000 half was genuinely unreachable (Chrome/Firefox both block port 6000, the X11 port, per their restricted-port lists); 6001 was never actually blocked anywhere, so if asked, the honest reason for the move is "6000 was dead and we replaced the whole pair," not "the browsers blocked both."</a:t>
             </a:r>
             <a:endParaRPr lang="en-US" dirty="0"/>
           </a:p>
@@ -1044,7 +1045,7 @@
           <a:p>
             <a:r>
               <a:rPr lang="en-US" dirty="0"/>
-              <a:t>Cliffhanger: "Next week we wire the whole course into one CI/CD pipeline — Red vs Blue: sneak a vuln past the gate, or block it."</a:t>
+              <a:t>Recap. Cold-call: "the agent read a malicious email and wired money — which leg of privilege+input+channel would you cut, and how?" ~2 min.</a:t>
             </a:r>
             <a:endParaRPr lang="en-US" dirty="0"/>
           </a:p>
@@ -1068,6 +1069,94 @@
             <a:fld id="{F7021451-1387-4CA6-816F-3879F97B5CBC}" type="slidenum">
               <a:rPr lang="en-US"/>
               <a:t>15</a:t>
+            </a:fld>
+            <a:endParaRPr lang="en-US"/>
+          </a:p>
+        </p:txBody>
+      </p:sp>
+    </p:spTree>
+    <p:extLst>
+      <p:ext uri="{BB962C8B-B14F-4D97-AF65-F5344CB8AC3E}">
+        <p14:creationId xmlns:p14="http://schemas.microsoft.com/office/powerpoint/2010/main" val="1024086991"/>
+      </p:ext>
+    </p:extLst>
+  </p:cSld>
+  <p:clrMapOvr>
+    <a:masterClrMapping/>
+  </p:clrMapOvr>
+</p:notes>
+</file>
+
+<file path=ppt/notesSlides/notesSlide16.xml><?xml version="1.0" encoding="utf-8"?>
+<p:notes xmlns:a="http://schemas.openxmlformats.org/drawingml/2006/main" xmlns:r="http://schemas.openxmlformats.org/officeDocument/2006/relationships" xmlns:p="http://schemas.openxmlformats.org/presentationml/2006/main">
+  <p:cSld>
+    <p:spTree>
+      <p:nvGrpSpPr>
+        <p:cNvPr id="1" name=""/>
+        <p:cNvGrpSpPr/>
+        <p:nvPr/>
+      </p:nvGrpSpPr>
+      <p:grpSpPr>
+        <a:xfrm>
+          <a:off x="0" y="0"/>
+          <a:ext cx="0" cy="0"/>
+          <a:chOff x="0" y="0"/>
+          <a:chExt cx="0" cy="0"/>
+        </a:xfrm>
+      </p:grpSpPr>
+      <p:sp>
+        <p:nvSpPr>
+          <p:cNvPr id="2" name="Slide Image Placeholder 1"/>
+          <p:cNvSpPr>
+            <a:spLocks noGrp="1" noRot="1" noChangeAspect="1"/>
+          </p:cNvSpPr>
+          <p:nvPr>
+            <p:ph type="sldImg"/>
+          </p:nvPr>
+        </p:nvSpPr>
+        <p:spPr/>
+      </p:sp>
+      <p:sp>
+        <p:nvSpPr>
+          <p:cNvPr id="3" name="Notes Placeholder 2"/>
+          <p:cNvSpPr>
+            <a:spLocks noGrp="1"/>
+          </p:cNvSpPr>
+          <p:nvPr>
+            <p:ph type="body" idx="1"/>
+          </p:nvPr>
+        </p:nvSpPr>
+        <p:spPr/>
+        <p:txBody>
+          <a:bodyPr/>
+          <a:lstStyle/>
+          <a:p>
+            <a:r>
+              <a:rPr lang="en-US" dirty="0"/>
+              <a:t>Cliffhanger: "Next week we wire the whole course into one CI/CD pipeline — Red vs Blue: sneak a vuln past the gate, or block it."</a:t>
+            </a:r>
+            <a:endParaRPr lang="en-US" dirty="0"/>
+          </a:p>
+        </p:txBody>
+      </p:sp>
+      <p:sp>
+        <p:nvSpPr>
+          <p:cNvPr id="4" name="Slide Number Placeholder 3"/>
+          <p:cNvSpPr>
+            <a:spLocks noGrp="1"/>
+          </p:cNvSpPr>
+          <p:nvPr>
+            <p:ph type="sldNum" sz="quarter" idx="10"/>
+          </p:nvPr>
+        </p:nvSpPr>
+        <p:spPr/>
+        <p:txBody>
+          <a:bodyPr/>
+          <a:lstStyle/>
+          <a:p>
+            <a:fld id="{F7021451-1387-4CA6-816F-3879F97B5CBC}" type="slidenum">
+              <a:rPr lang="en-US"/>
+              <a:t>16</a:t>
             </a:fld>
             <a:endParaRPr lang="en-US"/>
           </a:p>
@@ -2381,7 +2470,7 @@
                 <a:ea typeface="Arial" pitchFamily="34" charset="-122"/>
                 <a:cs typeface="Arial" pitchFamily="34" charset="-120"/>
               </a:rPr>
-              <a:t>Defenses</a:t>
+              <a:t>No boundary in the context window</a:t>
             </a:r>
             <a:endParaRPr lang="en-US" sz="2600" dirty="0"/>
           </a:p>
@@ -2389,43 +2478,14 @@
       </p:sp>
       <p:sp>
         <p:nvSpPr>
-          <p:cNvPr id="5" name="Shape 2"/>
-          <p:cNvSpPr/>
-          <p:nvPr/>
-        </p:nvSpPr>
-        <p:spPr>
-          <a:xfrm>
-            <a:off x="457200" y="1325880"/>
-            <a:ext cx="8229600" cy="2523744"/>
-          </a:xfrm>
-          <a:prstGeom prst="roundRect">
-            <a:avLst>
-              <a:gd name="adj" fmla="val 2899"/>
-            </a:avLst>
-          </a:prstGeom>
-          <a:solidFill>
-            <a:srgbClr val="F1F5F9"/>
-          </a:solidFill>
-          <a:ln/>
-          <a:effectLst>
-            <a:outerShdw sx="100000" sy="100000" kx="0" ky="0" algn="bl" rotWithShape="0" blurRad="76200" dist="25400" dir="5400000">
-              <a:srgbClr val="000000">
-                <a:alpha val="12000"/>
-              </a:srgbClr>
-            </a:outerShdw>
-          </a:effectLst>
-        </p:spPr>
-      </p:sp>
-      <p:sp>
-        <p:nvSpPr>
-          <p:cNvPr id="6" name="Text 3"/>
-          <p:cNvSpPr/>
-          <p:nvPr/>
-        </p:nvSpPr>
-        <p:spPr>
-          <a:xfrm>
-            <a:off x="731520" y="1435608"/>
-            <a:ext cx="7680960" cy="2304288"/>
+          <p:cNvPr id="5" name="Text 2"/>
+          <p:cNvSpPr/>
+          <p:nvPr/>
+        </p:nvSpPr>
+        <p:spPr>
+          <a:xfrm>
+            <a:off x="548640" y="1325880"/>
+            <a:ext cx="8046720" cy="2194560"/>
           </a:xfrm>
           <a:prstGeom prst="rect">
             <a:avLst/>
@@ -2439,12 +2499,8 @@
           </a:bodyPr>
           <a:lstStyle/>
           <a:p>
-            <a:pPr marL="342900" indent="-342900">
-              <a:spcAft>
-                <a:spcPts val="600"/>
-              </a:spcAft>
-              <a:buSzPct val="100000"/>
-              <a:buChar char="•"/>
+            <a:pPr indent="0" marL="0">
+              <a:buNone/>
             </a:pPr>
             <a:r>
               <a:rPr lang="en-US" sz="1400" dirty="0">
@@ -2455,108 +2511,45 @@
                 <a:ea typeface="Calibri" pitchFamily="34" charset="-122"/>
                 <a:cs typeface="Calibri" pitchFamily="34" charset="-120"/>
               </a:rPr>
-              <a:t>Input/output guardrails + content filtering — you'll build this: guarded_chatbot.py's regex denylist</a:t>
+              <a:t>See diagram: The system prompt, the user's typed turn, and any retrieved document all arrive at the model as the same run of text, with nothing marking any of it as data instead of instruction. The reply leaves the same way — untrusted, attacker-shaped text — and if it's passed unescaped into HTML, a shell, or SQL, whatever the model said just executes there. The model itself cannot fix this: there's no tag inside the context window that says "this part is data." The guards have to live outside the model — input_guardrail, redact_secret and escape — which is exactly guarded_chatbot.py. (web only)</a:t>
             </a:r>
             <a:endParaRPr lang="en-US" sz="1400" dirty="0"/>
           </a:p>
-          <a:p>
-            <a:pPr marL="342900" indent="-342900">
-              <a:spcAft>
-                <a:spcPts val="600"/>
-              </a:spcAft>
-              <a:buSzPct val="100000"/>
-              <a:buChar char="•"/>
-            </a:pPr>
-            <a:r>
-              <a:rPr lang="en-US" sz="1400" dirty="0">
-                <a:solidFill>
-                  <a:srgbClr val="1F2937"/>
+        </p:txBody>
+      </p:sp>
+      <p:sp>
+        <p:nvSpPr>
+          <p:cNvPr id="6" name="Text 3"/>
+          <p:cNvSpPr/>
+          <p:nvPr/>
+        </p:nvSpPr>
+        <p:spPr>
+          <a:xfrm>
+            <a:off x="457200" y="4800600"/>
+            <a:ext cx="6949440" cy="274320"/>
+          </a:xfrm>
+          <a:prstGeom prst="rect">
+            <a:avLst/>
+          </a:prstGeom>
+          <a:noFill/>
+          <a:ln/>
+        </p:spPr>
+        <p:txBody>
+          <a:bodyPr wrap="square" lIns="0" tIns="0" rIns="0" bIns="0" rtlCol="0" anchor="ctr"/>
+          <a:lstStyle/>
+          <a:p>
+            <a:pPr indent="0" marL="0">
+              <a:buNone/>
+            </a:pPr>
+            <a:r>
+              <a:rPr lang="en-US" sz="900" dirty="0">
+                <a:solidFill>
+                  <a:srgbClr val="64748B"/>
                 </a:solidFill>
                 <a:latin typeface="Calibri" pitchFamily="34" charset="0"/>
                 <a:ea typeface="Calibri" pitchFamily="34" charset="-122"/>
                 <a:cs typeface="Calibri" pitchFamily="34" charset="-120"/>
               </a:rPr>
-              <a:t>Strict output schemas/validation; encode before downstream use — you'll build this: HTML-escaping the model's output</a:t>
-            </a:r>
-            <a:endParaRPr lang="en-US" sz="1400" dirty="0"/>
-          </a:p>
-          <a:p>
-            <a:pPr marL="342900" indent="-342900">
-              <a:spcAft>
-                <a:spcPts val="600"/>
-              </a:spcAft>
-              <a:buSzPct val="100000"/>
-              <a:buChar char="•"/>
-            </a:pPr>
-            <a:r>
-              <a:rPr lang="en-US" sz="1400" dirty="0">
-                <a:solidFill>
-                  <a:srgbClr val="1F2937"/>
-                </a:solidFill>
-                <a:latin typeface="Calibri" pitchFamily="34" charset="0"/>
-                <a:ea typeface="Calibri" pitchFamily="34" charset="-122"/>
-                <a:cs typeface="Calibri" pitchFamily="34" charset="-120"/>
-              </a:rPr>
-              <a:t>Redact secrets before they can reach a response — you'll build this: redact_secret()</a:t>
-            </a:r>
-            <a:endParaRPr lang="en-US" sz="1400" dirty="0"/>
-          </a:p>
-          <a:p>
-            <a:pPr marL="342900" indent="-342900">
-              <a:spcAft>
-                <a:spcPts val="600"/>
-              </a:spcAft>
-              <a:buSzPct val="100000"/>
-              <a:buChar char="•"/>
-            </a:pPr>
-            <a:r>
-              <a:rPr lang="en-US" sz="1400" dirty="0">
-                <a:solidFill>
-                  <a:srgbClr val="1F2937"/>
-                </a:solidFill>
-                <a:latin typeface="Calibri" pitchFamily="34" charset="0"/>
-                <a:ea typeface="Calibri" pitchFamily="34" charset="-122"/>
-                <a:cs typeface="Calibri" pitchFamily="34" charset="-120"/>
-              </a:rPr>
-              <a:t>Least-privilege tool access, human-in-the-loop, rate limits, isolating untrusted RAG content — concepts only this week (worksheet Q5); no agent/tool-calling code exists in this lab to demo</a:t>
-            </a:r>
-            <a:endParaRPr lang="en-US" sz="1400" dirty="0"/>
-          </a:p>
-        </p:txBody>
-      </p:sp>
-      <p:sp>
-        <p:nvSpPr>
-          <p:cNvPr id="7" name="Text 4"/>
-          <p:cNvSpPr/>
-          <p:nvPr/>
-        </p:nvSpPr>
-        <p:spPr>
-          <a:xfrm>
-            <a:off x="457200" y="4800600"/>
-            <a:ext cx="6949440" cy="274320"/>
-          </a:xfrm>
-          <a:prstGeom prst="rect">
-            <a:avLst/>
-          </a:prstGeom>
-          <a:noFill/>
-          <a:ln/>
-        </p:spPr>
-        <p:txBody>
-          <a:bodyPr wrap="square" lIns="0" tIns="0" rIns="0" bIns="0" rtlCol="0" anchor="ctr"/>
-          <a:lstStyle/>
-          <a:p>
-            <a:pPr indent="0" marL="0">
-              <a:buNone/>
-            </a:pPr>
-            <a:r>
-              <a:rPr lang="en-US" sz="900" dirty="0">
-                <a:solidFill>
-                  <a:srgbClr val="64748B"/>
-                </a:solidFill>
-                <a:latin typeface="Calibri" pitchFamily="34" charset="0"/>
-                <a:ea typeface="Calibri" pitchFamily="34" charset="-122"/>
-                <a:cs typeface="Calibri" pitchFamily="34" charset="-120"/>
-              </a:rPr>
               <a:t>Software Security · Week 14</a:t>
             </a:r>
             <a:endParaRPr lang="en-US" sz="900" dirty="0"/>
@@ -2565,7 +2558,7 @@
       </p:sp>
       <p:pic>
         <p:nvPicPr>
-          <p:cNvPr id="8" name="Image 1" descr="/Users/pop7/Library/CloudStorage/OneDrive-MonsterConnectCo.,Ltd/Lecture/KOSEN69 - software-security/slides/pptx/assets/logo-small.png">    </p:cNvPr>
+          <p:cNvPr id="7" name="Image 1" descr="/Users/pop7/Library/CloudStorage/OneDrive-MonsterConnectCo.,Ltd/Lecture/KOSEN69 - software-security/slides/pptx/assets/logo-small.png">    </p:cNvPr>
           <p:cNvPicPr>
             <a:picLocks noChangeAspect="1"/>
           </p:cNvPicPr>
@@ -2703,7 +2696,7 @@
                 <a:ea typeface="Arial" pitchFamily="34" charset="-122"/>
                 <a:cs typeface="Arial" pitchFamily="34" charset="-120"/>
               </a:rPr>
-              <a:t>🧙 Game — Gandalf Challenge</a:t>
+              <a:t>Defenses</a:t>
             </a:r>
             <a:endParaRPr lang="en-US" sz="2600" dirty="0"/>
           </a:p>
@@ -2717,16 +2710,25 @@
         </p:nvSpPr>
         <p:spPr>
           <a:xfrm>
-            <a:off x="502920" y="1325880"/>
-            <a:ext cx="384048" cy="384048"/>
-          </a:xfrm>
-          <a:prstGeom prst="ellipse">
-            <a:avLst/>
+            <a:off x="457200" y="1325880"/>
+            <a:ext cx="8229600" cy="2523744"/>
+          </a:xfrm>
+          <a:prstGeom prst="roundRect">
+            <a:avLst>
+              <a:gd name="adj" fmla="val 2899"/>
+            </a:avLst>
           </a:prstGeom>
           <a:solidFill>
-            <a:srgbClr val="E35205"/>
+            <a:srgbClr val="F1F5F9"/>
           </a:solidFill>
           <a:ln/>
+          <a:effectLst>
+            <a:outerShdw sx="100000" sy="100000" kx="0" ky="0" algn="bl" rotWithShape="0" blurRad="76200" dist="25400" dir="5400000">
+              <a:srgbClr val="000000">
+                <a:alpha val="12000"/>
+              </a:srgbClr>
+            </a:outerShdw>
+          </a:effectLst>
         </p:spPr>
       </p:sp>
       <p:sp>
@@ -2737,8 +2739,8 @@
         </p:nvSpPr>
         <p:spPr>
           <a:xfrm>
-            <a:off x="502920" y="1325880"/>
-            <a:ext cx="384048" cy="384048"/>
+            <a:off x="731520" y="1435608"/>
+            <a:ext cx="7680960" cy="2304288"/>
           </a:xfrm>
           <a:prstGeom prst="rect">
             <a:avLst/>
@@ -2747,55 +2749,20 @@
           <a:ln/>
         </p:spPr>
         <p:txBody>
-          <a:bodyPr wrap="square" lIns="0" tIns="0" rIns="0" bIns="0" rtlCol="0" anchor="ctr"/>
-          <a:lstStyle/>
-          <a:p>
-            <a:pPr algn="ctr" indent="0" marL="0">
-              <a:buNone/>
-            </a:pPr>
-            <a:r>
-              <a:rPr lang="en-US" sz="1500" b="1" dirty="0">
-                <a:solidFill>
-                  <a:srgbClr val="0E1726"/>
-                </a:solidFill>
-                <a:latin typeface="Arial" pitchFamily="34" charset="0"/>
-                <a:ea typeface="Arial" pitchFamily="34" charset="-122"/>
-                <a:cs typeface="Arial" pitchFamily="34" charset="-120"/>
-              </a:rPr>
-              <a:t>1</a:t>
-            </a:r>
-            <a:endParaRPr lang="en-US" sz="1500" dirty="0"/>
-          </a:p>
-        </p:txBody>
-      </p:sp>
-      <p:sp>
-        <p:nvSpPr>
-          <p:cNvPr id="7" name="Text 4"/>
-          <p:cNvSpPr/>
-          <p:nvPr/>
-        </p:nvSpPr>
-        <p:spPr>
-          <a:xfrm>
-            <a:off x="1051560" y="1325880"/>
-            <a:ext cx="7589520" cy="658368"/>
-          </a:xfrm>
-          <a:prstGeom prst="rect">
-            <a:avLst/>
-          </a:prstGeom>
-          <a:noFill/>
-          <a:ln/>
-        </p:spPr>
-        <p:txBody>
-          <a:bodyPr wrap="square" lIns="0" tIns="0" rIns="0" bIns="0" rtlCol="0" anchor="ctr">
+          <a:bodyPr wrap="square" lIns="0" tIns="0" rIns="0" bIns="0" rtlCol="0" anchor="t">
             <a:normAutofit/>
           </a:bodyPr>
           <a:lstStyle/>
           <a:p>
-            <a:pPr indent="0" marL="0">
-              <a:buNone/>
-            </a:pPr>
-            <a:r>
-              <a:rPr lang="en-US" sz="1350" dirty="0">
+            <a:pPr marL="342900" indent="-342900">
+              <a:spcAft>
+                <a:spcPts val="600"/>
+              </a:spcAft>
+              <a:buSzPct val="100000"/>
+              <a:buChar char="•"/>
+            </a:pPr>
+            <a:r>
+              <a:rPr lang="en-US" sz="1400" dirty="0">
                 <a:solidFill>
                   <a:srgbClr val="1F2937"/>
                 </a:solidFill>
@@ -2803,99 +2770,20 @@
                 <a:ea typeface="Calibri" pitchFamily="34" charset="-122"/>
                 <a:cs typeface="Calibri" pitchFamily="34" charset="-120"/>
               </a:rPr>
-              <a:t>Beat Gandalf levels via direct prompt injection → exfiltrate the secret (real external service, leaderboard by level)</a:t>
-            </a:r>
-            <a:endParaRPr lang="en-US" sz="1350" dirty="0"/>
-          </a:p>
-        </p:txBody>
-      </p:sp>
-      <p:sp>
-        <p:nvSpPr>
-          <p:cNvPr id="8" name="Shape 5"/>
-          <p:cNvSpPr/>
-          <p:nvPr/>
-        </p:nvSpPr>
-        <p:spPr>
-          <a:xfrm>
-            <a:off x="502920" y="2057400"/>
-            <a:ext cx="384048" cy="384048"/>
-          </a:xfrm>
-          <a:prstGeom prst="ellipse">
-            <a:avLst/>
-          </a:prstGeom>
-          <a:solidFill>
-            <a:srgbClr val="E35205"/>
-          </a:solidFill>
-          <a:ln/>
-        </p:spPr>
-      </p:sp>
-      <p:sp>
-        <p:nvSpPr>
-          <p:cNvPr id="9" name="Text 6"/>
-          <p:cNvSpPr/>
-          <p:nvPr/>
-        </p:nvSpPr>
-        <p:spPr>
-          <a:xfrm>
-            <a:off x="502920" y="2057400"/>
-            <a:ext cx="384048" cy="384048"/>
-          </a:xfrm>
-          <a:prstGeom prst="rect">
-            <a:avLst/>
-          </a:prstGeom>
-          <a:noFill/>
-          <a:ln/>
-        </p:spPr>
-        <p:txBody>
-          <a:bodyPr wrap="square" lIns="0" tIns="0" rIns="0" bIns="0" rtlCol="0" anchor="ctr"/>
-          <a:lstStyle/>
-          <a:p>
-            <a:pPr algn="ctr" indent="0" marL="0">
-              <a:buNone/>
-            </a:pPr>
-            <a:r>
-              <a:rPr lang="en-US" sz="1500" b="1" dirty="0">
-                <a:solidFill>
-                  <a:srgbClr val="0E1726"/>
-                </a:solidFill>
-                <a:latin typeface="Arial" pitchFamily="34" charset="0"/>
-                <a:ea typeface="Arial" pitchFamily="34" charset="-122"/>
-                <a:cs typeface="Arial" pitchFamily="34" charset="-120"/>
-              </a:rPr>
-              <a:t>2</a:t>
-            </a:r>
-            <a:endParaRPr lang="en-US" sz="1500" dirty="0"/>
-          </a:p>
-        </p:txBody>
-      </p:sp>
-      <p:sp>
-        <p:nvSpPr>
-          <p:cNvPr id="10" name="Text 7"/>
-          <p:cNvSpPr/>
-          <p:nvPr/>
-        </p:nvSpPr>
-        <p:spPr>
-          <a:xfrm>
-            <a:off x="1051560" y="2057400"/>
-            <a:ext cx="7589520" cy="658368"/>
-          </a:xfrm>
-          <a:prstGeom prst="rect">
-            <a:avLst/>
-          </a:prstGeom>
-          <a:noFill/>
-          <a:ln/>
-        </p:spPr>
-        <p:txBody>
-          <a:bodyPr wrap="square" lIns="0" tIns="0" rIns="0" bIns="0" rtlCol="0" anchor="ctr">
-            <a:normAutofit/>
-          </a:bodyPr>
-          <a:lstStyle/>
-          <a:p>
-            <a:pPr indent="0" marL="0">
-              <a:buNone/>
-            </a:pPr>
-            <a:r>
-              <a:rPr lang="en-US" sz="1350" dirty="0">
+              <a:t>Input/output guardrails + content filtering — you'll build this: guarded_chatbot.py's regex denylist</a:t>
+            </a:r>
+            <a:endParaRPr lang="en-US" sz="1400" dirty="0"/>
+          </a:p>
+          <a:p>
+            <a:pPr marL="342900" indent="-342900">
+              <a:spcAft>
+                <a:spcPts val="600"/>
+              </a:spcAft>
+              <a:buSzPct val="100000"/>
+              <a:buChar char="•"/>
+            </a:pPr>
+            <a:r>
+              <a:rPr lang="en-US" sz="1400" dirty="0">
                 <a:solidFill>
                   <a:srgbClr val="1F2937"/>
                 </a:solidFill>
@@ -2903,99 +2791,20 @@
                 <a:ea typeface="Calibri" pitchFamily="34" charset="-122"/>
                 <a:cs typeface="Calibri" pitchFamily="34" charset="-120"/>
               </a:rPr>
-              <a:t>Round 2 (graded): replay your winning injection + the reflected-XSS payload against the guarded bot — does it still land?</a:t>
-            </a:r>
-            <a:endParaRPr lang="en-US" sz="1350" dirty="0"/>
-          </a:p>
-        </p:txBody>
-      </p:sp>
-      <p:sp>
-        <p:nvSpPr>
-          <p:cNvPr id="11" name="Shape 8"/>
-          <p:cNvSpPr/>
-          <p:nvPr/>
-        </p:nvSpPr>
-        <p:spPr>
-          <a:xfrm>
-            <a:off x="502920" y="2788920"/>
-            <a:ext cx="384048" cy="384048"/>
-          </a:xfrm>
-          <a:prstGeom prst="ellipse">
-            <a:avLst/>
-          </a:prstGeom>
-          <a:solidFill>
-            <a:srgbClr val="E35205"/>
-          </a:solidFill>
-          <a:ln/>
-        </p:spPr>
-      </p:sp>
-      <p:sp>
-        <p:nvSpPr>
-          <p:cNvPr id="12" name="Text 9"/>
-          <p:cNvSpPr/>
-          <p:nvPr/>
-        </p:nvSpPr>
-        <p:spPr>
-          <a:xfrm>
-            <a:off x="502920" y="2788920"/>
-            <a:ext cx="384048" cy="384048"/>
-          </a:xfrm>
-          <a:prstGeom prst="rect">
-            <a:avLst/>
-          </a:prstGeom>
-          <a:noFill/>
-          <a:ln/>
-        </p:spPr>
-        <p:txBody>
-          <a:bodyPr wrap="square" lIns="0" tIns="0" rIns="0" bIns="0" rtlCol="0" anchor="ctr"/>
-          <a:lstStyle/>
-          <a:p>
-            <a:pPr algn="ctr" indent="0" marL="0">
-              <a:buNone/>
-            </a:pPr>
-            <a:r>
-              <a:rPr lang="en-US" sz="1500" b="1" dirty="0">
-                <a:solidFill>
-                  <a:srgbClr val="0E1726"/>
-                </a:solidFill>
-                <a:latin typeface="Arial" pitchFamily="34" charset="0"/>
-                <a:ea typeface="Arial" pitchFamily="34" charset="-122"/>
-                <a:cs typeface="Arial" pitchFamily="34" charset="-120"/>
-              </a:rPr>
-              <a:t>3</a:t>
-            </a:r>
-            <a:endParaRPr lang="en-US" sz="1500" dirty="0"/>
-          </a:p>
-        </p:txBody>
-      </p:sp>
-      <p:sp>
-        <p:nvSpPr>
-          <p:cNvPr id="13" name="Text 10"/>
-          <p:cNvSpPr/>
-          <p:nvPr/>
-        </p:nvSpPr>
-        <p:spPr>
-          <a:xfrm>
-            <a:off x="1051560" y="2788920"/>
-            <a:ext cx="7589520" cy="658368"/>
-          </a:xfrm>
-          <a:prstGeom prst="rect">
-            <a:avLst/>
-          </a:prstGeom>
-          <a:noFill/>
-          <a:ln/>
-        </p:spPr>
-        <p:txBody>
-          <a:bodyPr wrap="square" lIns="0" tIns="0" rIns="0" bIns="0" rtlCol="0" anchor="ctr">
-            <a:normAutofit/>
-          </a:bodyPr>
-          <a:lstStyle/>
-          <a:p>
-            <a:pPr indent="0" marL="0">
-              <a:buNone/>
-            </a:pPr>
-            <a:r>
-              <a:rPr lang="en-US" sz="1350" dirty="0">
+              <a:t>Strict output schemas/validation; encode before downstream use — you'll build this: HTML-escaping the model's output</a:t>
+            </a:r>
+            <a:endParaRPr lang="en-US" sz="1400" dirty="0"/>
+          </a:p>
+          <a:p>
+            <a:pPr marL="342900" indent="-342900">
+              <a:spcAft>
+                <a:spcPts val="600"/>
+              </a:spcAft>
+              <a:buSzPct val="100000"/>
+              <a:buChar char="•"/>
+            </a:pPr>
+            <a:r>
+              <a:rPr lang="en-US" sz="1400" dirty="0">
                 <a:solidFill>
                   <a:srgbClr val="1F2937"/>
                 </a:solidFill>
@@ -3003,45 +2812,107 @@
                 <a:ea typeface="Calibri" pitchFamily="34" charset="-122"/>
                 <a:cs typeface="Calibri" pitchFamily="34" charset="-120"/>
               </a:rPr>
-              <a:t>Written only: tool poisoning / excessive agency on an MCP-style agent (worksheet Q5) — no agent exists in this lab to demo live</a:t>
-            </a:r>
-            <a:endParaRPr lang="en-US" sz="1350" dirty="0"/>
-          </a:p>
-        </p:txBody>
-      </p:sp>
-      <p:sp>
-        <p:nvSpPr>
-          <p:cNvPr id="14" name="Text 11"/>
-          <p:cNvSpPr/>
-          <p:nvPr/>
-        </p:nvSpPr>
-        <p:spPr>
-          <a:xfrm>
-            <a:off x="457200" y="4800600"/>
-            <a:ext cx="6949440" cy="274320"/>
-          </a:xfrm>
-          <a:prstGeom prst="rect">
-            <a:avLst/>
-          </a:prstGeom>
-          <a:noFill/>
-          <a:ln/>
-        </p:spPr>
-        <p:txBody>
-          <a:bodyPr wrap="square" lIns="0" tIns="0" rIns="0" bIns="0" rtlCol="0" anchor="ctr"/>
-          <a:lstStyle/>
-          <a:p>
-            <a:pPr indent="0" marL="0">
-              <a:buNone/>
-            </a:pPr>
-            <a:r>
-              <a:rPr lang="en-US" sz="900" dirty="0">
-                <a:solidFill>
-                  <a:srgbClr val="64748B"/>
+              <a:t>Redact secrets before they can reach a response — you'll build this: redact_secret()</a:t>
+            </a:r>
+            <a:endParaRPr lang="en-US" sz="1400" dirty="0"/>
+          </a:p>
+          <a:p>
+            <a:pPr marL="342900" indent="-342900">
+              <a:spcAft>
+                <a:spcPts val="600"/>
+              </a:spcAft>
+              <a:buSzPct val="100000"/>
+              <a:buChar char="•"/>
+            </a:pPr>
+            <a:r>
+              <a:rPr lang="en-US" sz="1400" dirty="0">
+                <a:solidFill>
+                  <a:srgbClr val="1F2937"/>
                 </a:solidFill>
                 <a:latin typeface="Calibri" pitchFamily="34" charset="0"/>
                 <a:ea typeface="Calibri" pitchFamily="34" charset="-122"/>
                 <a:cs typeface="Calibri" pitchFamily="34" charset="-120"/>
               </a:rPr>
+              <a:t>Least-privilege tool access, human-in-the-loop, rate limits, isolating untrusted RAG content — concepts only this week (worksheet Q5); no agent/tool-calling code exists in this lab to demo</a:t>
+            </a:r>
+            <a:endParaRPr lang="en-US" sz="1400" dirty="0"/>
+          </a:p>
+        </p:txBody>
+      </p:sp>
+      <p:sp>
+        <p:nvSpPr>
+          <p:cNvPr id="7" name="Text 4"/>
+          <p:cNvSpPr/>
+          <p:nvPr/>
+        </p:nvSpPr>
+        <p:spPr>
+          <a:xfrm>
+            <a:off x="548640" y="4014216"/>
+            <a:ext cx="8046720" cy="548640"/>
+          </a:xfrm>
+          <a:prstGeom prst="rect">
+            <a:avLst/>
+          </a:prstGeom>
+          <a:noFill/>
+          <a:ln/>
+        </p:spPr>
+        <p:txBody>
+          <a:bodyPr wrap="square" lIns="0" tIns="0" rIns="0" bIns="0" rtlCol="0" anchor="t">
+            <a:normAutofit/>
+          </a:bodyPr>
+          <a:lstStyle/>
+          <a:p>
+            <a:pPr indent="0" marL="0">
+              <a:buNone/>
+            </a:pPr>
+            <a:r>
+              <a:rPr lang="en-US" sz="1400" dirty="0">
+                <a:solidFill>
+                  <a:srgbClr val="1F2937"/>
+                </a:solidFill>
+                <a:latin typeface="Calibri" pitchFamily="34" charset="0"/>
+                <a:ea typeface="Calibri" pitchFamily="34" charset="-122"/>
+                <a:cs typeface="Calibri" pitchFamily="34" charset="-120"/>
+              </a:rPr>
+              <a:t>Try it live: /sim/prompt-guard (interactive simulation, web only)</a:t>
+            </a:r>
+            <a:endParaRPr lang="en-US" sz="1400" dirty="0"/>
+          </a:p>
+        </p:txBody>
+      </p:sp>
+      <p:sp>
+        <p:nvSpPr>
+          <p:cNvPr id="8" name="Text 5"/>
+          <p:cNvSpPr/>
+          <p:nvPr/>
+        </p:nvSpPr>
+        <p:spPr>
+          <a:xfrm>
+            <a:off x="457200" y="4800600"/>
+            <a:ext cx="6949440" cy="274320"/>
+          </a:xfrm>
+          <a:prstGeom prst="rect">
+            <a:avLst/>
+          </a:prstGeom>
+          <a:noFill/>
+          <a:ln/>
+        </p:spPr>
+        <p:txBody>
+          <a:bodyPr wrap="square" lIns="0" tIns="0" rIns="0" bIns="0" rtlCol="0" anchor="ctr"/>
+          <a:lstStyle/>
+          <a:p>
+            <a:pPr indent="0" marL="0">
+              <a:buNone/>
+            </a:pPr>
+            <a:r>
+              <a:rPr lang="en-US" sz="900" dirty="0">
+                <a:solidFill>
+                  <a:srgbClr val="64748B"/>
+                </a:solidFill>
+                <a:latin typeface="Calibri" pitchFamily="34" charset="0"/>
+                <a:ea typeface="Calibri" pitchFamily="34" charset="-122"/>
+                <a:cs typeface="Calibri" pitchFamily="34" charset="-120"/>
+              </a:rPr>
               <a:t>Software Security · Week 14</a:t>
             </a:r>
             <a:endParaRPr lang="en-US" sz="900" dirty="0"/>
@@ -3050,7 +2921,7 @@
       </p:sp>
       <p:pic>
         <p:nvPicPr>
-          <p:cNvPr id="15" name="Image 1" descr="/Users/pop7/Library/CloudStorage/OneDrive-MonsterConnectCo.,Ltd/Lecture/KOSEN69 - software-security/slides/pptx/assets/logo-small.png">    </p:cNvPr>
+          <p:cNvPr id="9" name="Image 1" descr="/Users/pop7/Library/CloudStorage/OneDrive-MonsterConnectCo.,Ltd/Lecture/KOSEN69 - software-security/slides/pptx/assets/logo-small.png">    </p:cNvPr>
           <p:cNvPicPr>
             <a:picLocks noChangeAspect="1"/>
           </p:cNvPicPr>
@@ -3188,7 +3059,7 @@
                 <a:ea typeface="Arial" pitchFamily="34" charset="-122"/>
                 <a:cs typeface="Arial" pitchFamily="34" charset="-120"/>
               </a:rPr>
-              <a:t>Deliverable</a:t>
+              <a:t>🧙 Game — Gandalf Challenge</a:t>
             </a:r>
             <a:endParaRPr lang="en-US" sz="2600" dirty="0"/>
           </a:p>
@@ -3202,16 +3073,14 @@
         </p:nvSpPr>
         <p:spPr>
           <a:xfrm>
-            <a:off x="457200" y="1325880"/>
-            <a:ext cx="8229600" cy="822960"/>
-          </a:xfrm>
-          <a:prstGeom prst="roundRect">
-            <a:avLst>
-              <a:gd name="adj" fmla="val 8889"/>
-            </a:avLst>
+            <a:off x="502920" y="1325880"/>
+            <a:ext cx="384048" cy="384048"/>
+          </a:xfrm>
+          <a:prstGeom prst="ellipse">
+            <a:avLst/>
           </a:prstGeom>
           <a:solidFill>
-            <a:srgbClr val="E8EDF3"/>
+            <a:srgbClr val="E35205"/>
           </a:solidFill>
           <a:ln/>
         </p:spPr>
@@ -3224,8 +3093,47 @@
         </p:nvSpPr>
         <p:spPr>
           <a:xfrm>
-            <a:off x="731520" y="1325880"/>
-            <a:ext cx="7680960" cy="822960"/>
+            <a:off x="502920" y="1325880"/>
+            <a:ext cx="384048" cy="384048"/>
+          </a:xfrm>
+          <a:prstGeom prst="rect">
+            <a:avLst/>
+          </a:prstGeom>
+          <a:noFill/>
+          <a:ln/>
+        </p:spPr>
+        <p:txBody>
+          <a:bodyPr wrap="square" lIns="0" tIns="0" rIns="0" bIns="0" rtlCol="0" anchor="ctr"/>
+          <a:lstStyle/>
+          <a:p>
+            <a:pPr algn="ctr" indent="0" marL="0">
+              <a:buNone/>
+            </a:pPr>
+            <a:r>
+              <a:rPr lang="en-US" sz="1500" b="1" dirty="0">
+                <a:solidFill>
+                  <a:srgbClr val="0E1726"/>
+                </a:solidFill>
+                <a:latin typeface="Arial" pitchFamily="34" charset="0"/>
+                <a:ea typeface="Arial" pitchFamily="34" charset="-122"/>
+                <a:cs typeface="Arial" pitchFamily="34" charset="-120"/>
+              </a:rPr>
+              <a:t>1</a:t>
+            </a:r>
+            <a:endParaRPr lang="en-US" sz="1500" dirty="0"/>
+          </a:p>
+        </p:txBody>
+      </p:sp>
+      <p:sp>
+        <p:nvSpPr>
+          <p:cNvPr id="7" name="Text 4"/>
+          <p:cNvSpPr/>
+          <p:nvPr/>
+        </p:nvSpPr>
+        <p:spPr>
+          <a:xfrm>
+            <a:off x="1051560" y="1325880"/>
+            <a:ext cx="7589520" cy="658368"/>
           </a:xfrm>
           <a:prstGeom prst="rect">
             <a:avLst/>
@@ -3243,59 +3151,50 @@
               <a:buNone/>
             </a:pPr>
             <a:r>
-              <a:rPr lang="en-US" sz="1400" i="1" dirty="0">
-                <a:solidFill>
-                  <a:srgbClr val="E35205"/>
+              <a:rPr lang="en-US" sz="1350" dirty="0">
+                <a:solidFill>
+                  <a:srgbClr val="1F2937"/>
                 </a:solidFill>
                 <a:latin typeface="Calibri" pitchFamily="34" charset="0"/>
                 <a:ea typeface="Calibri" pitchFamily="34" charset="-122"/>
                 <a:cs typeface="Calibri" pitchFamily="34" charset="-120"/>
               </a:rPr>
-              <a:t>📋 Worksheet 14 — labs/week14-ai-llm-security/worksheet.md (Part 3) · kickoff: docker compose up → :8082 (insecure) / :8083 (guarded)</a:t>
-            </a:r>
-            <a:endParaRPr lang="en-US" sz="1400" dirty="0"/>
-          </a:p>
-        </p:txBody>
-      </p:sp>
-      <p:sp>
-        <p:nvSpPr>
-          <p:cNvPr id="7" name="Shape 4"/>
-          <p:cNvSpPr/>
-          <p:nvPr/>
-        </p:nvSpPr>
-        <p:spPr>
-          <a:xfrm>
-            <a:off x="457200" y="2313432"/>
-            <a:ext cx="8229600" cy="2231136"/>
-          </a:xfrm>
-          <a:prstGeom prst="roundRect">
-            <a:avLst>
-              <a:gd name="adj" fmla="val 3279"/>
-            </a:avLst>
+              <a:t>Beat Gandalf levels via direct prompt injection → exfiltrate the secret (real external service, leaderboard by level)</a:t>
+            </a:r>
+            <a:endParaRPr lang="en-US" sz="1350" dirty="0"/>
+          </a:p>
+        </p:txBody>
+      </p:sp>
+      <p:sp>
+        <p:nvSpPr>
+          <p:cNvPr id="8" name="Shape 5"/>
+          <p:cNvSpPr/>
+          <p:nvPr/>
+        </p:nvSpPr>
+        <p:spPr>
+          <a:xfrm>
+            <a:off x="502920" y="2057400"/>
+            <a:ext cx="384048" cy="384048"/>
+          </a:xfrm>
+          <a:prstGeom prst="ellipse">
+            <a:avLst/>
           </a:prstGeom>
           <a:solidFill>
-            <a:srgbClr val="F1F5F9"/>
+            <a:srgbClr val="E35205"/>
           </a:solidFill>
           <a:ln/>
-          <a:effectLst>
-            <a:outerShdw sx="100000" sy="100000" kx="0" ky="0" algn="bl" rotWithShape="0" blurRad="76200" dist="25400" dir="5400000">
-              <a:srgbClr val="000000">
-                <a:alpha val="12000"/>
-              </a:srgbClr>
-            </a:outerShdw>
-          </a:effectLst>
-        </p:spPr>
-      </p:sp>
-      <p:sp>
-        <p:nvSpPr>
-          <p:cNvPr id="8" name="Text 5"/>
-          <p:cNvSpPr/>
-          <p:nvPr/>
-        </p:nvSpPr>
-        <p:spPr>
-          <a:xfrm>
-            <a:off x="731520" y="2423160"/>
-            <a:ext cx="7680960" cy="2011680"/>
+        </p:spPr>
+      </p:sp>
+      <p:sp>
+        <p:nvSpPr>
+          <p:cNvPr id="9" name="Text 6"/>
+          <p:cNvSpPr/>
+          <p:nvPr/>
+        </p:nvSpPr>
+        <p:spPr>
+          <a:xfrm>
+            <a:off x="502920" y="2057400"/>
+            <a:ext cx="384048" cy="384048"/>
           </a:xfrm>
           <a:prstGeom prst="rect">
             <a:avLst/>
@@ -3304,20 +3203,55 @@
           <a:ln/>
         </p:spPr>
         <p:txBody>
-          <a:bodyPr wrap="square" lIns="0" tIns="0" rIns="0" bIns="0" rtlCol="0" anchor="t">
+          <a:bodyPr wrap="square" lIns="0" tIns="0" rIns="0" bIns="0" rtlCol="0" anchor="ctr"/>
+          <a:lstStyle/>
+          <a:p>
+            <a:pPr algn="ctr" indent="0" marL="0">
+              <a:buNone/>
+            </a:pPr>
+            <a:r>
+              <a:rPr lang="en-US" sz="1500" b="1" dirty="0">
+                <a:solidFill>
+                  <a:srgbClr val="0E1726"/>
+                </a:solidFill>
+                <a:latin typeface="Arial" pitchFamily="34" charset="0"/>
+                <a:ea typeface="Arial" pitchFamily="34" charset="-122"/>
+                <a:cs typeface="Arial" pitchFamily="34" charset="-120"/>
+              </a:rPr>
+              <a:t>2</a:t>
+            </a:r>
+            <a:endParaRPr lang="en-US" sz="1500" dirty="0"/>
+          </a:p>
+        </p:txBody>
+      </p:sp>
+      <p:sp>
+        <p:nvSpPr>
+          <p:cNvPr id="10" name="Text 7"/>
+          <p:cNvSpPr/>
+          <p:nvPr/>
+        </p:nvSpPr>
+        <p:spPr>
+          <a:xfrm>
+            <a:off x="1051560" y="2057400"/>
+            <a:ext cx="7589520" cy="658368"/>
+          </a:xfrm>
+          <a:prstGeom prst="rect">
+            <a:avLst/>
+          </a:prstGeom>
+          <a:noFill/>
+          <a:ln/>
+        </p:spPr>
+        <p:txBody>
+          <a:bodyPr wrap="square" lIns="0" tIns="0" rIns="0" bIns="0" rtlCol="0" anchor="ctr">
             <a:normAutofit/>
           </a:bodyPr>
           <a:lstStyle/>
           <a:p>
-            <a:pPr marL="342900" indent="-342900">
-              <a:spcAft>
-                <a:spcPts val="600"/>
-              </a:spcAft>
-              <a:buSzPct val="100000"/>
-              <a:buChar char="•"/>
-            </a:pPr>
-            <a:r>
-              <a:rPr lang="en-US" sz="1400" dirty="0">
+            <a:pPr indent="0" marL="0">
+              <a:buNone/>
+            </a:pPr>
+            <a:r>
+              <a:rPr lang="en-US" sz="1350" dirty="0">
                 <a:solidFill>
                   <a:srgbClr val="1F2937"/>
                 </a:solidFill>
@@ -3325,20 +3259,99 @@
                 <a:ea typeface="Calibri" pitchFamily="34" charset="-122"/>
                 <a:cs typeface="Calibri" pitchFamily="34" charset="-120"/>
               </a:rPr>
-              <a:t>Attack log: prompt-injection disclosure (Task 1) + reflected-XSS from unescaped output (Task 2)</a:t>
-            </a:r>
-            <a:endParaRPr lang="en-US" sz="1400" dirty="0"/>
-          </a:p>
-          <a:p>
-            <a:pPr marL="342900" indent="-342900">
-              <a:spcAft>
-                <a:spcPts val="600"/>
-              </a:spcAft>
-              <a:buSzPct val="100000"/>
-              <a:buChar char="•"/>
-            </a:pPr>
-            <a:r>
-              <a:rPr lang="en-US" sz="1400" dirty="0">
+              <a:t>Round 2 (graded): replay your winning injection + the reflected-XSS payload against the guarded bot — does it still land?</a:t>
+            </a:r>
+            <a:endParaRPr lang="en-US" sz="1350" dirty="0"/>
+          </a:p>
+        </p:txBody>
+      </p:sp>
+      <p:sp>
+        <p:nvSpPr>
+          <p:cNvPr id="11" name="Shape 8"/>
+          <p:cNvSpPr/>
+          <p:nvPr/>
+        </p:nvSpPr>
+        <p:spPr>
+          <a:xfrm>
+            <a:off x="502920" y="2788920"/>
+            <a:ext cx="384048" cy="384048"/>
+          </a:xfrm>
+          <a:prstGeom prst="ellipse">
+            <a:avLst/>
+          </a:prstGeom>
+          <a:solidFill>
+            <a:srgbClr val="E35205"/>
+          </a:solidFill>
+          <a:ln/>
+        </p:spPr>
+      </p:sp>
+      <p:sp>
+        <p:nvSpPr>
+          <p:cNvPr id="12" name="Text 9"/>
+          <p:cNvSpPr/>
+          <p:nvPr/>
+        </p:nvSpPr>
+        <p:spPr>
+          <a:xfrm>
+            <a:off x="502920" y="2788920"/>
+            <a:ext cx="384048" cy="384048"/>
+          </a:xfrm>
+          <a:prstGeom prst="rect">
+            <a:avLst/>
+          </a:prstGeom>
+          <a:noFill/>
+          <a:ln/>
+        </p:spPr>
+        <p:txBody>
+          <a:bodyPr wrap="square" lIns="0" tIns="0" rIns="0" bIns="0" rtlCol="0" anchor="ctr"/>
+          <a:lstStyle/>
+          <a:p>
+            <a:pPr algn="ctr" indent="0" marL="0">
+              <a:buNone/>
+            </a:pPr>
+            <a:r>
+              <a:rPr lang="en-US" sz="1500" b="1" dirty="0">
+                <a:solidFill>
+                  <a:srgbClr val="0E1726"/>
+                </a:solidFill>
+                <a:latin typeface="Arial" pitchFamily="34" charset="0"/>
+                <a:ea typeface="Arial" pitchFamily="34" charset="-122"/>
+                <a:cs typeface="Arial" pitchFamily="34" charset="-120"/>
+              </a:rPr>
+              <a:t>3</a:t>
+            </a:r>
+            <a:endParaRPr lang="en-US" sz="1500" dirty="0"/>
+          </a:p>
+        </p:txBody>
+      </p:sp>
+      <p:sp>
+        <p:nvSpPr>
+          <p:cNvPr id="13" name="Text 10"/>
+          <p:cNvSpPr/>
+          <p:nvPr/>
+        </p:nvSpPr>
+        <p:spPr>
+          <a:xfrm>
+            <a:off x="1051560" y="2788920"/>
+            <a:ext cx="7589520" cy="658368"/>
+          </a:xfrm>
+          <a:prstGeom prst="rect">
+            <a:avLst/>
+          </a:prstGeom>
+          <a:noFill/>
+          <a:ln/>
+        </p:spPr>
+        <p:txBody>
+          <a:bodyPr wrap="square" lIns="0" tIns="0" rIns="0" bIns="0" rtlCol="0" anchor="ctr">
+            <a:normAutofit/>
+          </a:bodyPr>
+          <a:lstStyle/>
+          <a:p>
+            <a:pPr indent="0" marL="0">
+              <a:buNone/>
+            </a:pPr>
+            <a:r>
+              <a:rPr lang="en-US" sz="1350" dirty="0">
                 <a:solidFill>
                   <a:srgbClr val="1F2937"/>
                 </a:solidFill>
@@ -3346,108 +3359,45 @@
                 <a:ea typeface="Calibri" pitchFamily="34" charset="-122"/>
                 <a:cs typeface="Calibri" pitchFamily="34" charset="-120"/>
               </a:rPr>
-              <a:t>Written: indirect-injection thought experiment (Task 3)</a:t>
-            </a:r>
-            <a:endParaRPr lang="en-US" sz="1400" dirty="0"/>
-          </a:p>
-          <a:p>
-            <a:pPr marL="342900" indent="-342900">
-              <a:spcAft>
-                <a:spcPts val="600"/>
-              </a:spcAft>
-              <a:buSzPct val="100000"/>
-              <a:buChar char="•"/>
-            </a:pPr>
-            <a:r>
-              <a:rPr lang="en-US" sz="1400" dirty="0">
-                <a:solidFill>
-                  <a:srgbClr val="1F2937"/>
+              <a:t>Written only: tool poisoning / excessive agency on an MCP-style agent (worksheet Q5) — no agent exists in this lab to demo live</a:t>
+            </a:r>
+            <a:endParaRPr lang="en-US" sz="1350" dirty="0"/>
+          </a:p>
+        </p:txBody>
+      </p:sp>
+      <p:sp>
+        <p:nvSpPr>
+          <p:cNvPr id="14" name="Text 11"/>
+          <p:cNvSpPr/>
+          <p:nvPr/>
+        </p:nvSpPr>
+        <p:spPr>
+          <a:xfrm>
+            <a:off x="457200" y="4800600"/>
+            <a:ext cx="6949440" cy="274320"/>
+          </a:xfrm>
+          <a:prstGeom prst="rect">
+            <a:avLst/>
+          </a:prstGeom>
+          <a:noFill/>
+          <a:ln/>
+        </p:spPr>
+        <p:txBody>
+          <a:bodyPr wrap="square" lIns="0" tIns="0" rIns="0" bIns="0" rtlCol="0" anchor="ctr"/>
+          <a:lstStyle/>
+          <a:p>
+            <a:pPr indent="0" marL="0">
+              <a:buNone/>
+            </a:pPr>
+            <a:r>
+              <a:rPr lang="en-US" sz="900" dirty="0">
+                <a:solidFill>
+                  <a:srgbClr val="64748B"/>
                 </a:solidFill>
                 <a:latin typeface="Calibri" pitchFamily="34" charset="0"/>
                 <a:ea typeface="Calibri" pitchFamily="34" charset="-122"/>
                 <a:cs typeface="Calibri" pitchFamily="34" charset="-120"/>
               </a:rPr>
-              <a:t>Gandalf leaderboard result (Task 4)</a:t>
-            </a:r>
-            <a:endParaRPr lang="en-US" sz="1400" dirty="0"/>
-          </a:p>
-          <a:p>
-            <a:pPr marL="342900" indent="-342900">
-              <a:spcAft>
-                <a:spcPts val="600"/>
-              </a:spcAft>
-              <a:buSzPct val="100000"/>
-              <a:buChar char="•"/>
-            </a:pPr>
-            <a:r>
-              <a:rPr lang="en-US" sz="1400" dirty="0">
-                <a:solidFill>
-                  <a:srgbClr val="1F2937"/>
-                </a:solidFill>
-                <a:latin typeface="Calibri" pitchFamily="34" charset="0"/>
-                <a:ea typeface="Calibri" pitchFamily="34" charset="-122"/>
-                <a:cs typeface="Calibri" pitchFamily="34" charset="-120"/>
-              </a:rPr>
-              <a:t>Mitigations + re-test results against the guarded bot (Task 5)</a:t>
-            </a:r>
-            <a:endParaRPr lang="en-US" sz="1400" dirty="0"/>
-          </a:p>
-          <a:p>
-            <a:pPr marL="342900" indent="-342900">
-              <a:spcAft>
-                <a:spcPts val="600"/>
-              </a:spcAft>
-              <a:buSzPct val="100000"/>
-              <a:buChar char="•"/>
-            </a:pPr>
-            <a:r>
-              <a:rPr lang="en-US" sz="1400" dirty="0">
-                <a:solidFill>
-                  <a:srgbClr val="1F2937"/>
-                </a:solidFill>
-                <a:latin typeface="Calibri" pitchFamily="34" charset="0"/>
-                <a:ea typeface="Calibri" pitchFamily="34" charset="-122"/>
-                <a:cs typeface="Calibri" pitchFamily="34" charset="-120"/>
-              </a:rPr>
-              <a:t>Written: least-privilege agent/MCP tool design (Part 2 Q5 — reflection, not a build)</a:t>
-            </a:r>
-            <a:endParaRPr lang="en-US" sz="1400" dirty="0"/>
-          </a:p>
-        </p:txBody>
-      </p:sp>
-      <p:sp>
-        <p:nvSpPr>
-          <p:cNvPr id="9" name="Text 6"/>
-          <p:cNvSpPr/>
-          <p:nvPr/>
-        </p:nvSpPr>
-        <p:spPr>
-          <a:xfrm>
-            <a:off x="457200" y="4800600"/>
-            <a:ext cx="6949440" cy="274320"/>
-          </a:xfrm>
-          <a:prstGeom prst="rect">
-            <a:avLst/>
-          </a:prstGeom>
-          <a:noFill/>
-          <a:ln/>
-        </p:spPr>
-        <p:txBody>
-          <a:bodyPr wrap="square" lIns="0" tIns="0" rIns="0" bIns="0" rtlCol="0" anchor="ctr"/>
-          <a:lstStyle/>
-          <a:p>
-            <a:pPr indent="0" marL="0">
-              <a:buNone/>
-            </a:pPr>
-            <a:r>
-              <a:rPr lang="en-US" sz="900" dirty="0">
-                <a:solidFill>
-                  <a:srgbClr val="64748B"/>
-                </a:solidFill>
-                <a:latin typeface="Calibri" pitchFamily="34" charset="0"/>
-                <a:ea typeface="Calibri" pitchFamily="34" charset="-122"/>
-                <a:cs typeface="Calibri" pitchFamily="34" charset="-120"/>
-              </a:rPr>
               <a:t>Software Security · Week 14</a:t>
             </a:r>
             <a:endParaRPr lang="en-US" sz="900" dirty="0"/>
@@ -3456,7 +3406,7 @@
       </p:sp>
       <p:pic>
         <p:nvPicPr>
-          <p:cNvPr id="10" name="Image 1" descr="/Users/pop7/Library/CloudStorage/OneDrive-MonsterConnectCo.,Ltd/Lecture/KOSEN69 - software-security/slides/pptx/assets/logo-small.png">    </p:cNvPr>
+          <p:cNvPr id="15" name="Image 1" descr="/Users/pop7/Library/CloudStorage/OneDrive-MonsterConnectCo.,Ltd/Lecture/KOSEN69 - software-security/slides/pptx/assets/logo-small.png">    </p:cNvPr>
           <p:cNvPicPr>
             <a:picLocks noChangeAspect="1"/>
           </p:cNvPicPr>
@@ -3594,7 +3544,7 @@
                 <a:ea typeface="Arial" pitchFamily="34" charset="-122"/>
                 <a:cs typeface="Arial" pitchFamily="34" charset="-120"/>
               </a:rPr>
-              <a:t>Deliverable (cont.)</a:t>
+              <a:t>Deliverable</a:t>
             </a:r>
             <a:endParaRPr lang="en-US" sz="2600" dirty="0"/>
           </a:p>
@@ -3609,11 +3559,74 @@
         <p:spPr>
           <a:xfrm>
             <a:off x="457200" y="1325880"/>
-            <a:ext cx="8229600" cy="585216"/>
+            <a:ext cx="8229600" cy="822960"/>
           </a:xfrm>
           <a:prstGeom prst="roundRect">
             <a:avLst>
-              <a:gd name="adj" fmla="val 12500"/>
+              <a:gd name="adj" fmla="val 8889"/>
+            </a:avLst>
+          </a:prstGeom>
+          <a:solidFill>
+            <a:srgbClr val="E8EDF3"/>
+          </a:solidFill>
+          <a:ln/>
+        </p:spPr>
+      </p:sp>
+      <p:sp>
+        <p:nvSpPr>
+          <p:cNvPr id="6" name="Text 3"/>
+          <p:cNvSpPr/>
+          <p:nvPr/>
+        </p:nvSpPr>
+        <p:spPr>
+          <a:xfrm>
+            <a:off x="731520" y="1325880"/>
+            <a:ext cx="7680960" cy="822960"/>
+          </a:xfrm>
+          <a:prstGeom prst="rect">
+            <a:avLst/>
+          </a:prstGeom>
+          <a:noFill/>
+          <a:ln/>
+        </p:spPr>
+        <p:txBody>
+          <a:bodyPr wrap="square" lIns="0" tIns="0" rIns="0" bIns="0" rtlCol="0" anchor="ctr">
+            <a:normAutofit/>
+          </a:bodyPr>
+          <a:lstStyle/>
+          <a:p>
+            <a:pPr indent="0" marL="0">
+              <a:buNone/>
+            </a:pPr>
+            <a:r>
+              <a:rPr lang="en-US" sz="1400" i="1" dirty="0">
+                <a:solidFill>
+                  <a:srgbClr val="E35205"/>
+                </a:solidFill>
+                <a:latin typeface="Calibri" pitchFamily="34" charset="0"/>
+                <a:ea typeface="Calibri" pitchFamily="34" charset="-122"/>
+                <a:cs typeface="Calibri" pitchFamily="34" charset="-120"/>
+              </a:rPr>
+              <a:t>📋 Worksheet 14 — labs/week14-ai-llm-security/worksheet.md (Part 3) · kickoff: docker compose up → :8082 (insecure) / :8083 (guarded)</a:t>
+            </a:r>
+            <a:endParaRPr lang="en-US" sz="1400" dirty="0"/>
+          </a:p>
+        </p:txBody>
+      </p:sp>
+      <p:sp>
+        <p:nvSpPr>
+          <p:cNvPr id="7" name="Shape 4"/>
+          <p:cNvSpPr/>
+          <p:nvPr/>
+        </p:nvSpPr>
+        <p:spPr>
+          <a:xfrm>
+            <a:off x="457200" y="2313432"/>
+            <a:ext cx="8229600" cy="2231136"/>
+          </a:xfrm>
+          <a:prstGeom prst="roundRect">
+            <a:avLst>
+              <a:gd name="adj" fmla="val 3279"/>
             </a:avLst>
           </a:prstGeom>
           <a:solidFill>
@@ -3631,14 +3644,14 @@
       </p:sp>
       <p:sp>
         <p:nvSpPr>
-          <p:cNvPr id="6" name="Text 3"/>
-          <p:cNvSpPr/>
-          <p:nvPr/>
-        </p:nvSpPr>
-        <p:spPr>
-          <a:xfrm>
-            <a:off x="731520" y="1435608"/>
-            <a:ext cx="7680960" cy="365760"/>
+          <p:cNvPr id="8" name="Text 5"/>
+          <p:cNvSpPr/>
+          <p:nvPr/>
+        </p:nvSpPr>
+        <p:spPr>
+          <a:xfrm>
+            <a:off x="731520" y="2423160"/>
+            <a:ext cx="7680960" cy="2011680"/>
           </a:xfrm>
           <a:prstGeom prst="rect">
             <a:avLst/>
@@ -3668,45 +3681,129 @@
                 <a:ea typeface="Calibri" pitchFamily="34" charset="-122"/>
                 <a:cs typeface="Calibri" pitchFamily="34" charset="-120"/>
               </a:rPr>
-              <a:t>+ Audit the AI / EiPE / Prompt Problem (see worksheet)</a:t>
+              <a:t>Attack log: prompt-injection disclosure (Task 1) + reflected-XSS from unescaped output (Task 2)</a:t>
             </a:r>
             <a:endParaRPr lang="en-US" sz="1400" dirty="0"/>
           </a:p>
-        </p:txBody>
-      </p:sp>
-      <p:sp>
-        <p:nvSpPr>
-          <p:cNvPr id="7" name="Text 4"/>
-          <p:cNvSpPr/>
-          <p:nvPr/>
-        </p:nvSpPr>
-        <p:spPr>
-          <a:xfrm>
-            <a:off x="457200" y="4800600"/>
-            <a:ext cx="6949440" cy="274320"/>
-          </a:xfrm>
-          <a:prstGeom prst="rect">
-            <a:avLst/>
-          </a:prstGeom>
-          <a:noFill/>
-          <a:ln/>
-        </p:spPr>
-        <p:txBody>
-          <a:bodyPr wrap="square" lIns="0" tIns="0" rIns="0" bIns="0" rtlCol="0" anchor="ctr"/>
-          <a:lstStyle/>
-          <a:p>
-            <a:pPr indent="0" marL="0">
-              <a:buNone/>
-            </a:pPr>
-            <a:r>
-              <a:rPr lang="en-US" sz="900" dirty="0">
-                <a:solidFill>
-                  <a:srgbClr val="64748B"/>
+          <a:p>
+            <a:pPr marL="342900" indent="-342900">
+              <a:spcAft>
+                <a:spcPts val="600"/>
+              </a:spcAft>
+              <a:buSzPct val="100000"/>
+              <a:buChar char="•"/>
+            </a:pPr>
+            <a:r>
+              <a:rPr lang="en-US" sz="1400" dirty="0">
+                <a:solidFill>
+                  <a:srgbClr val="1F2937"/>
                 </a:solidFill>
                 <a:latin typeface="Calibri" pitchFamily="34" charset="0"/>
                 <a:ea typeface="Calibri" pitchFamily="34" charset="-122"/>
                 <a:cs typeface="Calibri" pitchFamily="34" charset="-120"/>
               </a:rPr>
+              <a:t>Written: indirect-injection thought experiment (Task 3)</a:t>
+            </a:r>
+            <a:endParaRPr lang="en-US" sz="1400" dirty="0"/>
+          </a:p>
+          <a:p>
+            <a:pPr marL="342900" indent="-342900">
+              <a:spcAft>
+                <a:spcPts val="600"/>
+              </a:spcAft>
+              <a:buSzPct val="100000"/>
+              <a:buChar char="•"/>
+            </a:pPr>
+            <a:r>
+              <a:rPr lang="en-US" sz="1400" dirty="0">
+                <a:solidFill>
+                  <a:srgbClr val="1F2937"/>
+                </a:solidFill>
+                <a:latin typeface="Calibri" pitchFamily="34" charset="0"/>
+                <a:ea typeface="Calibri" pitchFamily="34" charset="-122"/>
+                <a:cs typeface="Calibri" pitchFamily="34" charset="-120"/>
+              </a:rPr>
+              <a:t>Gandalf leaderboard result (Task 4)</a:t>
+            </a:r>
+            <a:endParaRPr lang="en-US" sz="1400" dirty="0"/>
+          </a:p>
+          <a:p>
+            <a:pPr marL="342900" indent="-342900">
+              <a:spcAft>
+                <a:spcPts val="600"/>
+              </a:spcAft>
+              <a:buSzPct val="100000"/>
+              <a:buChar char="•"/>
+            </a:pPr>
+            <a:r>
+              <a:rPr lang="en-US" sz="1400" dirty="0">
+                <a:solidFill>
+                  <a:srgbClr val="1F2937"/>
+                </a:solidFill>
+                <a:latin typeface="Calibri" pitchFamily="34" charset="0"/>
+                <a:ea typeface="Calibri" pitchFamily="34" charset="-122"/>
+                <a:cs typeface="Calibri" pitchFamily="34" charset="-120"/>
+              </a:rPr>
+              <a:t>Mitigations + re-test results against the guarded bot (Task 5)</a:t>
+            </a:r>
+            <a:endParaRPr lang="en-US" sz="1400" dirty="0"/>
+          </a:p>
+          <a:p>
+            <a:pPr marL="342900" indent="-342900">
+              <a:spcAft>
+                <a:spcPts val="600"/>
+              </a:spcAft>
+              <a:buSzPct val="100000"/>
+              <a:buChar char="•"/>
+            </a:pPr>
+            <a:r>
+              <a:rPr lang="en-US" sz="1400" dirty="0">
+                <a:solidFill>
+                  <a:srgbClr val="1F2937"/>
+                </a:solidFill>
+                <a:latin typeface="Calibri" pitchFamily="34" charset="0"/>
+                <a:ea typeface="Calibri" pitchFamily="34" charset="-122"/>
+                <a:cs typeface="Calibri" pitchFamily="34" charset="-120"/>
+              </a:rPr>
+              <a:t>Written: least-privilege agent/MCP tool design (Part 2 Q5 — reflection, not a build)</a:t>
+            </a:r>
+            <a:endParaRPr lang="en-US" sz="1400" dirty="0"/>
+          </a:p>
+        </p:txBody>
+      </p:sp>
+      <p:sp>
+        <p:nvSpPr>
+          <p:cNvPr id="9" name="Text 6"/>
+          <p:cNvSpPr/>
+          <p:nvPr/>
+        </p:nvSpPr>
+        <p:spPr>
+          <a:xfrm>
+            <a:off x="457200" y="4800600"/>
+            <a:ext cx="6949440" cy="274320"/>
+          </a:xfrm>
+          <a:prstGeom prst="rect">
+            <a:avLst/>
+          </a:prstGeom>
+          <a:noFill/>
+          <a:ln/>
+        </p:spPr>
+        <p:txBody>
+          <a:bodyPr wrap="square" lIns="0" tIns="0" rIns="0" bIns="0" rtlCol="0" anchor="ctr"/>
+          <a:lstStyle/>
+          <a:p>
+            <a:pPr indent="0" marL="0">
+              <a:buNone/>
+            </a:pPr>
+            <a:r>
+              <a:rPr lang="en-US" sz="900" dirty="0">
+                <a:solidFill>
+                  <a:srgbClr val="64748B"/>
+                </a:solidFill>
+                <a:latin typeface="Calibri" pitchFamily="34" charset="0"/>
+                <a:ea typeface="Calibri" pitchFamily="34" charset="-122"/>
+                <a:cs typeface="Calibri" pitchFamily="34" charset="-120"/>
+              </a:rPr>
               <a:t>Software Security · Week 14</a:t>
             </a:r>
             <a:endParaRPr lang="en-US" sz="900" dirty="0"/>
@@ -3715,7 +3812,7 @@
       </p:sp>
       <p:pic>
         <p:nvPicPr>
-          <p:cNvPr id="8" name="Image 1" descr="/Users/pop7/Library/CloudStorage/OneDrive-MonsterConnectCo.,Ltd/Lecture/KOSEN69 - software-security/slides/pptx/assets/logo-small.png">    </p:cNvPr>
+          <p:cNvPr id="10" name="Image 1" descr="/Users/pop7/Library/CloudStorage/OneDrive-MonsterConnectCo.,Ltd/Lecture/KOSEN69 - software-security/slides/pptx/assets/logo-small.png">    </p:cNvPr>
           <p:cNvPicPr>
             <a:picLocks noChangeAspect="1"/>
           </p:cNvPicPr>
@@ -3853,7 +3950,7 @@
                 <a:ea typeface="Arial" pitchFamily="34" charset="-122"/>
                 <a:cs typeface="Arial" pitchFamily="34" charset="-120"/>
               </a:rPr>
-              <a:t>Key takeaways</a:t>
+              <a:t>Deliverable (cont.)</a:t>
             </a:r>
             <a:endParaRPr lang="en-US" sz="2600" dirty="0"/>
           </a:p>
@@ -3868,11 +3965,11 @@
         <p:spPr>
           <a:xfrm>
             <a:off x="457200" y="1325880"/>
-            <a:ext cx="8229600" cy="1207008"/>
+            <a:ext cx="8229600" cy="585216"/>
           </a:xfrm>
           <a:prstGeom prst="roundRect">
             <a:avLst>
-              <a:gd name="adj" fmla="val 6061"/>
+              <a:gd name="adj" fmla="val 12500"/>
             </a:avLst>
           </a:prstGeom>
           <a:solidFill>
@@ -3897,7 +3994,7 @@
         <p:spPr>
           <a:xfrm>
             <a:off x="731520" y="1435608"/>
-            <a:ext cx="7680960" cy="987552"/>
+            <a:ext cx="7680960" cy="365760"/>
           </a:xfrm>
           <a:prstGeom prst="rect">
             <a:avLst/>
@@ -3927,49 +4024,7 @@
                 <a:ea typeface="Calibri" pitchFamily="34" charset="-122"/>
                 <a:cs typeface="Calibri" pitchFamily="34" charset="-120"/>
               </a:rPr>
-              <a:t>Prompt injection = injection; LLM output = untrusted</a:t>
-            </a:r>
-            <a:endParaRPr lang="en-US" sz="1400" dirty="0"/>
-          </a:p>
-          <a:p>
-            <a:pPr marL="342900" indent="-342900">
-              <a:spcAft>
-                <a:spcPts val="600"/>
-              </a:spcAft>
-              <a:buSzPct val="100000"/>
-              <a:buChar char="•"/>
-            </a:pPr>
-            <a:r>
-              <a:rPr lang="en-US" sz="1400" dirty="0">
-                <a:solidFill>
-                  <a:srgbClr val="1F2937"/>
-                </a:solidFill>
-                <a:latin typeface="Calibri" pitchFamily="34" charset="0"/>
-                <a:ea typeface="Calibri" pitchFamily="34" charset="-122"/>
-                <a:cs typeface="Calibri" pitchFamily="34" charset="-120"/>
-              </a:rPr>
-              <a:t>Constrain agency: least-privilege tools, human approval</a:t>
-            </a:r>
-            <a:endParaRPr lang="en-US" sz="1400" dirty="0"/>
-          </a:p>
-          <a:p>
-            <a:pPr marL="342900" indent="-342900">
-              <a:spcAft>
-                <a:spcPts val="600"/>
-              </a:spcAft>
-              <a:buSzPct val="100000"/>
-              <a:buChar char="•"/>
-            </a:pPr>
-            <a:r>
-              <a:rPr lang="en-US" sz="1400" dirty="0">
-                <a:solidFill>
-                  <a:srgbClr val="1F2937"/>
-                </a:solidFill>
-                <a:latin typeface="Calibri" pitchFamily="34" charset="0"/>
-                <a:ea typeface="Calibri" pitchFamily="34" charset="-122"/>
-                <a:cs typeface="Calibri" pitchFamily="34" charset="-120"/>
-              </a:rPr>
-              <a:t>The field moves monthly — track OWASP LLM + ATLAS</a:t>
+              <a:t>+ Audit the AI / EiPE / Prompt Problem (see worksheet)</a:t>
             </a:r>
             <a:endParaRPr lang="en-US" sz="1400" dirty="0"/>
           </a:p>
@@ -4049,6 +4104,307 @@
 <file path=ppt/slides/slide15.xml><?xml version="1.0" encoding="utf-8"?>
 <p:sld xmlns:a="http://schemas.openxmlformats.org/drawingml/2006/main" xmlns:r="http://schemas.openxmlformats.org/officeDocument/2006/relationships" xmlns:p="http://schemas.openxmlformats.org/presentationml/2006/main">
   <p:cSld name="Slide 15">
+    <p:bg>
+      <p:bgPr>
+        <a:solidFill>
+          <a:srgbClr val="FFFFFF"/>
+        </a:solidFill>
+      </p:bgPr>
+    </p:bg>
+    <p:spTree>
+      <p:nvGrpSpPr>
+        <p:cNvPr id="1" name=""/>
+        <p:cNvGrpSpPr/>
+        <p:nvPr/>
+      </p:nvGrpSpPr>
+      <p:grpSpPr>
+        <a:xfrm>
+          <a:off x="0" y="0"/>
+          <a:ext cx="0" cy="0"/>
+          <a:chOff x="0" y="0"/>
+          <a:chExt cx="0" cy="0"/>
+        </a:xfrm>
+      </p:grpSpPr>
+      <p:sp>
+        <p:nvSpPr>
+          <p:cNvPr id="2" name="Shape 0"/>
+          <p:cNvSpPr/>
+          <p:nvPr/>
+        </p:nvSpPr>
+        <p:spPr>
+          <a:xfrm>
+            <a:off x="457200" y="384048"/>
+            <a:ext cx="530352" cy="530352"/>
+          </a:xfrm>
+          <a:prstGeom prst="ellipse">
+            <a:avLst/>
+          </a:prstGeom>
+          <a:solidFill>
+            <a:srgbClr val="E35205"/>
+          </a:solidFill>
+          <a:ln/>
+          <a:effectLst>
+            <a:outerShdw sx="100000" sy="100000" kx="0" ky="0" algn="bl" rotWithShape="0" blurRad="76200" dist="25400" dir="5400000">
+              <a:srgbClr val="000000">
+                <a:alpha val="12000"/>
+              </a:srgbClr>
+            </a:outerShdw>
+          </a:effectLst>
+        </p:spPr>
+      </p:sp>
+      <p:pic>
+        <p:nvPicPr>
+          <p:cNvPr id="3" name="Image 0" descr="preencoded.png">    </p:cNvPr>
+          <p:cNvPicPr>
+            <a:picLocks noChangeAspect="1"/>
+          </p:cNvPicPr>
+          <p:nvPr/>
+        </p:nvPicPr>
+        <p:blipFill>
+          <a:blip r:embed="rId1"/>
+          <a:stretch>
+            <a:fillRect/>
+          </a:stretch>
+        </p:blipFill>
+        <p:spPr>
+          <a:xfrm>
+            <a:off x="594360" y="521208"/>
+            <a:ext cx="256032" cy="256032"/>
+          </a:xfrm>
+          <a:prstGeom prst="rect">
+            <a:avLst/>
+          </a:prstGeom>
+        </p:spPr>
+      </p:pic>
+      <p:sp>
+        <p:nvSpPr>
+          <p:cNvPr id="4" name="Text 1"/>
+          <p:cNvSpPr/>
+          <p:nvPr/>
+        </p:nvSpPr>
+        <p:spPr>
+          <a:xfrm>
+            <a:off x="1143000" y="329184"/>
+            <a:ext cx="7498080" cy="603504"/>
+          </a:xfrm>
+          <a:prstGeom prst="rect">
+            <a:avLst/>
+          </a:prstGeom>
+          <a:noFill/>
+          <a:ln/>
+        </p:spPr>
+        <p:txBody>
+          <a:bodyPr wrap="square" lIns="0" tIns="0" rIns="0" bIns="0" rtlCol="0" anchor="ctr"/>
+          <a:lstStyle/>
+          <a:p>
+            <a:pPr indent="0" marL="0">
+              <a:buNone/>
+            </a:pPr>
+            <a:r>
+              <a:rPr lang="en-US" sz="2600" b="1" dirty="0">
+                <a:solidFill>
+                  <a:srgbClr val="1F2937"/>
+                </a:solidFill>
+                <a:latin typeface="Arial" pitchFamily="34" charset="0"/>
+                <a:ea typeface="Arial" pitchFamily="34" charset="-122"/>
+                <a:cs typeface="Arial" pitchFamily="34" charset="-120"/>
+              </a:rPr>
+              <a:t>Key takeaways</a:t>
+            </a:r>
+            <a:endParaRPr lang="en-US" sz="2600" dirty="0"/>
+          </a:p>
+        </p:txBody>
+      </p:sp>
+      <p:sp>
+        <p:nvSpPr>
+          <p:cNvPr id="5" name="Shape 2"/>
+          <p:cNvSpPr/>
+          <p:nvPr/>
+        </p:nvSpPr>
+        <p:spPr>
+          <a:xfrm>
+            <a:off x="457200" y="1325880"/>
+            <a:ext cx="8229600" cy="1207008"/>
+          </a:xfrm>
+          <a:prstGeom prst="roundRect">
+            <a:avLst>
+              <a:gd name="adj" fmla="val 6061"/>
+            </a:avLst>
+          </a:prstGeom>
+          <a:solidFill>
+            <a:srgbClr val="F1F5F9"/>
+          </a:solidFill>
+          <a:ln/>
+          <a:effectLst>
+            <a:outerShdw sx="100000" sy="100000" kx="0" ky="0" algn="bl" rotWithShape="0" blurRad="76200" dist="25400" dir="5400000">
+              <a:srgbClr val="000000">
+                <a:alpha val="12000"/>
+              </a:srgbClr>
+            </a:outerShdw>
+          </a:effectLst>
+        </p:spPr>
+      </p:sp>
+      <p:sp>
+        <p:nvSpPr>
+          <p:cNvPr id="6" name="Text 3"/>
+          <p:cNvSpPr/>
+          <p:nvPr/>
+        </p:nvSpPr>
+        <p:spPr>
+          <a:xfrm>
+            <a:off x="731520" y="1435608"/>
+            <a:ext cx="7680960" cy="987552"/>
+          </a:xfrm>
+          <a:prstGeom prst="rect">
+            <a:avLst/>
+          </a:prstGeom>
+          <a:noFill/>
+          <a:ln/>
+        </p:spPr>
+        <p:txBody>
+          <a:bodyPr wrap="square" lIns="0" tIns="0" rIns="0" bIns="0" rtlCol="0" anchor="t">
+            <a:normAutofit/>
+          </a:bodyPr>
+          <a:lstStyle/>
+          <a:p>
+            <a:pPr marL="342900" indent="-342900">
+              <a:spcAft>
+                <a:spcPts val="600"/>
+              </a:spcAft>
+              <a:buSzPct val="100000"/>
+              <a:buChar char="•"/>
+            </a:pPr>
+            <a:r>
+              <a:rPr lang="en-US" sz="1400" dirty="0">
+                <a:solidFill>
+                  <a:srgbClr val="1F2937"/>
+                </a:solidFill>
+                <a:latin typeface="Calibri" pitchFamily="34" charset="0"/>
+                <a:ea typeface="Calibri" pitchFamily="34" charset="-122"/>
+                <a:cs typeface="Calibri" pitchFamily="34" charset="-120"/>
+              </a:rPr>
+              <a:t>Prompt injection = injection; LLM output = untrusted</a:t>
+            </a:r>
+            <a:endParaRPr lang="en-US" sz="1400" dirty="0"/>
+          </a:p>
+          <a:p>
+            <a:pPr marL="342900" indent="-342900">
+              <a:spcAft>
+                <a:spcPts val="600"/>
+              </a:spcAft>
+              <a:buSzPct val="100000"/>
+              <a:buChar char="•"/>
+            </a:pPr>
+            <a:r>
+              <a:rPr lang="en-US" sz="1400" dirty="0">
+                <a:solidFill>
+                  <a:srgbClr val="1F2937"/>
+                </a:solidFill>
+                <a:latin typeface="Calibri" pitchFamily="34" charset="0"/>
+                <a:ea typeface="Calibri" pitchFamily="34" charset="-122"/>
+                <a:cs typeface="Calibri" pitchFamily="34" charset="-120"/>
+              </a:rPr>
+              <a:t>Constrain agency: least-privilege tools, human approval</a:t>
+            </a:r>
+            <a:endParaRPr lang="en-US" sz="1400" dirty="0"/>
+          </a:p>
+          <a:p>
+            <a:pPr marL="342900" indent="-342900">
+              <a:spcAft>
+                <a:spcPts val="600"/>
+              </a:spcAft>
+              <a:buSzPct val="100000"/>
+              <a:buChar char="•"/>
+            </a:pPr>
+            <a:r>
+              <a:rPr lang="en-US" sz="1400" dirty="0">
+                <a:solidFill>
+                  <a:srgbClr val="1F2937"/>
+                </a:solidFill>
+                <a:latin typeface="Calibri" pitchFamily="34" charset="0"/>
+                <a:ea typeface="Calibri" pitchFamily="34" charset="-122"/>
+                <a:cs typeface="Calibri" pitchFamily="34" charset="-120"/>
+              </a:rPr>
+              <a:t>The field moves monthly — track OWASP LLM + ATLAS</a:t>
+            </a:r>
+            <a:endParaRPr lang="en-US" sz="1400" dirty="0"/>
+          </a:p>
+        </p:txBody>
+      </p:sp>
+      <p:sp>
+        <p:nvSpPr>
+          <p:cNvPr id="7" name="Text 4"/>
+          <p:cNvSpPr/>
+          <p:nvPr/>
+        </p:nvSpPr>
+        <p:spPr>
+          <a:xfrm>
+            <a:off x="457200" y="4800600"/>
+            <a:ext cx="6949440" cy="274320"/>
+          </a:xfrm>
+          <a:prstGeom prst="rect">
+            <a:avLst/>
+          </a:prstGeom>
+          <a:noFill/>
+          <a:ln/>
+        </p:spPr>
+        <p:txBody>
+          <a:bodyPr wrap="square" lIns="0" tIns="0" rIns="0" bIns="0" rtlCol="0" anchor="ctr"/>
+          <a:lstStyle/>
+          <a:p>
+            <a:pPr indent="0" marL="0">
+              <a:buNone/>
+            </a:pPr>
+            <a:r>
+              <a:rPr lang="en-US" sz="900" dirty="0">
+                <a:solidFill>
+                  <a:srgbClr val="64748B"/>
+                </a:solidFill>
+                <a:latin typeface="Calibri" pitchFamily="34" charset="0"/>
+                <a:ea typeface="Calibri" pitchFamily="34" charset="-122"/>
+                <a:cs typeface="Calibri" pitchFamily="34" charset="-120"/>
+              </a:rPr>
+              <a:t>Software Security · Week 14</a:t>
+            </a:r>
+            <a:endParaRPr lang="en-US" sz="900" dirty="0"/>
+          </a:p>
+        </p:txBody>
+      </p:sp>
+      <p:pic>
+        <p:nvPicPr>
+          <p:cNvPr id="8" name="Image 1" descr="/Users/pop7/Library/CloudStorage/OneDrive-MonsterConnectCo.,Ltd/Lecture/KOSEN69 - software-security/slides/pptx/assets/logo-small.png">    </p:cNvPr>
+          <p:cNvPicPr>
+            <a:picLocks noChangeAspect="1"/>
+          </p:cNvPicPr>
+          <p:nvPr/>
+        </p:nvPicPr>
+        <p:blipFill>
+          <a:blip r:embed="rId2"/>
+          <a:stretch>
+            <a:fillRect/>
+          </a:stretch>
+        </p:blipFill>
+        <p:spPr>
+          <a:xfrm>
+            <a:off x="7882128" y="4700016"/>
+            <a:ext cx="768096" cy="356616"/>
+          </a:xfrm>
+          <a:prstGeom prst="rect">
+            <a:avLst/>
+          </a:prstGeom>
+        </p:spPr>
+      </p:pic>
+    </p:spTree>
+  </p:cSld>
+  <p:clrMapOvr>
+    <a:masterClrMapping/>
+  </p:clrMapOvr>
+</p:sld>
+</file>
+
+<file path=ppt/slides/slide16.xml><?xml version="1.0" encoding="utf-8"?>
+<p:sld xmlns:a="http://schemas.openxmlformats.org/drawingml/2006/main" xmlns:r="http://schemas.openxmlformats.org/officeDocument/2006/relationships" xmlns:p="http://schemas.openxmlformats.org/presentationml/2006/main">
+  <p:cSld name="Slide 16">
     <p:bg>
       <p:bgPr>
         <a:solidFill>
